--- a/Презентация_треш_кейсы_ОТ_желтые.pptx
+++ b/Презентация_треш_кейсы_ОТ_желтые.pptx
@@ -8,14 +8,14 @@
     <p:notesMasterId r:id="rId5"/>
   </p:notesMasterIdLst>
   <p:sldIdLst>
-    <p:sldId id="373" r:id="rId2"/>
-    <p:sldId id="374" r:id="rId4"/>
-    <p:sldId id="375" r:id="rId3"/>
-    <p:sldId id="376" r:id="rId10"/>
-    <p:sldId id="377" r:id="rId11"/>
-    <p:sldId id="378" r:id="rId12"/>
-    <p:sldId id="379" r:id="rId13"/>
-    <p:sldId id="380" r:id="rId14"/>
+    <p:sldId id="257" r:id="rId10"/>
+    <p:sldId id="258" r:id="rId11"/>
+    <p:sldId id="259" r:id="rId12"/>
+    <p:sldId id="260" r:id="rId13"/>
+    <p:sldId id="261" r:id="rId14"/>
+    <p:sldId id="262" r:id="rId15"/>
+    <p:sldId id="263" r:id="rId16"/>
+    <p:sldId id="264" r:id="rId17"/>
   </p:sldIdLst>
   <p:sldSz cx="12192000" cy="6858000"/>
   <p:notesSz cx="6858000" cy="9144000"/>
@@ -4116,16 +4116,14 @@
             </a:lvl1pPr>
           </a:lstStyle>
           <a:p>
-            <a:pPr>
-              <a:lnSpc>
-                <a:spcPct val="100000"/>
-              </a:lnSpc>
-            </a:pPr>
-            <a:r>
-              <a:rPr sz="2000" b="1"/>
+            <a:r>
+              <a:rPr sz="2000" b="1">
+                <a:solidFill>
+                  <a:srgbClr val="1A1A1A"/>
+                </a:solidFill>
+              </a:rPr>
               <a:t>ПОЗИЦИЯ СУДОВ ПО ВОПРОСУ квалификации травмы от конфликта в бытовке как НС на производстве</a:t>
             </a:r>
-            <a:endParaRPr sz="1800" dirty="0"/>
           </a:p>
         </p:txBody>
       </p:sp>
@@ -4158,9 +4156,9 @@
           <a:lstStyle/>
           <a:p>
             <a:fld id="{86CB4B4D-7CA3-9044-876B-883B54F8677D}" type="slidenum">
+              <a:rPr sz="1400"/>
               <a:t>1</a:t>
             </a:fld>
-            <a:endParaRPr dirty="0"/>
           </a:p>
         </p:txBody>
       </p:sp>
@@ -4210,19 +4208,14 @@
           </a:bodyPr>
           <a:lstStyle/>
           <a:p>
-            <a:pPr hangingPunct="0"/>
             <a:r>
               <a:rPr sz="1200" b="0">
-                <a:latin typeface="Montserrat Bold"/>
+                <a:solidFill>
+                  <a:srgbClr val="1A1A1A"/>
+                </a:solidFill>
               </a:rPr>
               <a:t>СУТЬ ДЕЛА: В бытовом помещении работодателя одна работница травмировала другую. Комиссия работодателя признала случай не связанным с производством; ГИТ обязала оформить акт Н-1 и оценить риск насилия от враждебно настроенных работников</a:t>
             </a:r>
-            <a:endParaRPr lang="ru-RU" sz="1600" dirty="0">
-              <a:solidFill>
-                <a:srgbClr val="000000"/>
-              </a:solidFill>
-              <a:sym typeface="Montserrat Regular"/>
-            </a:endParaRPr>
           </a:p>
         </p:txBody>
       </p:sp>
@@ -4278,31 +4271,14 @@
                     <a:bodyPr/>
                     <a:lstStyle/>
                     <a:p>
-                      <a:pPr algn="ctr">
-                        <a:lnSpc>
-                          <a:spcPct val="107000"/>
-                        </a:lnSpc>
-                        <a:spcAft>
-                          <a:spcPts val="800"/>
-                        </a:spcAft>
-                      </a:pPr>
                       <a:r>
-                        <a:rPr b="1" sz="1200">
+                        <a:rPr sz="1200" b="1">
                           <a:solidFill>
                             <a:srgbClr val="1A1A1A"/>
                           </a:solidFill>
                         </a:rPr>
                         <a:t>Позиция ГИТ / пострадавшей</a:t>
                       </a:r>
-                      <a:endParaRPr lang="ru-RU" sz="1600" kern="100" dirty="0">
-                        <a:solidFill>
-                          <a:schemeClr val="bg1"/>
-                        </a:solidFill>
-                        <a:effectLst/>
-                        <a:latin typeface="Montserrat Bold" panose="00000800000000000000" pitchFamily="2" charset="-52"/>
-                        <a:ea typeface="Aptos" panose="020B0004020202020204" pitchFamily="34" charset="0"/>
-                        <a:cs typeface="Times New Roman" panose="02020603050405020304" pitchFamily="18" charset="0"/>
-                      </a:endParaRPr>
                     </a:p>
                   </a:txBody>
                   <a:tcPr marL="0" marR="76200" marT="47625" marB="47625" anchor="ctr">
@@ -4318,31 +4294,14 @@
                     <a:bodyPr/>
                     <a:lstStyle/>
                     <a:p>
-                      <a:pPr algn="ctr">
-                        <a:lnSpc>
-                          <a:spcPct val="107000"/>
-                        </a:lnSpc>
-                        <a:spcAft>
-                          <a:spcPts val="800"/>
-                        </a:spcAft>
-                      </a:pPr>
                       <a:r>
-                        <a:rPr b="1" sz="1200">
+                        <a:rPr sz="1200" b="1">
                           <a:solidFill>
                             <a:srgbClr val="1A1A1A"/>
                           </a:solidFill>
                         </a:rPr>
                         <a:t>Позиция работодателя</a:t>
                       </a:r>
-                      <a:endParaRPr lang="ru-RU" sz="1600" kern="100" dirty="0">
-                        <a:solidFill>
-                          <a:schemeClr val="bg1"/>
-                        </a:solidFill>
-                        <a:effectLst/>
-                        <a:latin typeface="Montserrat Bold" panose="00000800000000000000" pitchFamily="2" charset="-52"/>
-                        <a:ea typeface="Aptos" panose="020B0004020202020204" pitchFamily="34" charset="0"/>
-                        <a:cs typeface="Times New Roman" panose="02020603050405020304" pitchFamily="18" charset="0"/>
-                      </a:endParaRPr>
                     </a:p>
                   </a:txBody>
                   <a:tcPr marL="76200" marR="76200" marT="47625" marB="47625" anchor="ctr">
@@ -4365,24 +4324,8 @@
                     <a:bodyPr/>
                     <a:lstStyle/>
                     <a:p>
-                      <a:pPr marL="0" marR="0" indent="0" algn="l" defTabSz="1828800" rtl="0" latinLnBrk="0">
-                        <a:lnSpc>
-                          <a:spcPct val="107000"/>
-                        </a:lnSpc>
-                        <a:spcBef>
-                          <a:spcPts val="0"/>
-                        </a:spcBef>
-                        <a:spcAft>
-                          <a:spcPts val="800"/>
-                        </a:spcAft>
-                        <a:buClrTx/>
-                        <a:buSzTx/>
-                        <a:buFontTx/>
-                        <a:buNone/>
-                        <a:tabLst/>
-                      </a:pPr>
                       <a:r>
-                        <a:rPr b="0" sz="1100">
+                        <a:rPr sz="1100" b="0">
                           <a:solidFill>
                             <a:srgbClr val="1A1A1A"/>
                           </a:solidFill>
@@ -4398,24 +4341,8 @@
                     <a:bodyPr/>
                     <a:lstStyle/>
                     <a:p>
-                      <a:pPr marL="0" marR="0" indent="0" algn="l" defTabSz="1828800" rtl="0" latinLnBrk="0">
-                        <a:lnSpc>
-                          <a:spcPct val="107000"/>
-                        </a:lnSpc>
-                        <a:spcBef>
-                          <a:spcPts val="0"/>
-                        </a:spcBef>
-                        <a:spcAft>
-                          <a:spcPts val="800"/>
-                        </a:spcAft>
-                        <a:buClrTx/>
-                        <a:buSzTx/>
-                        <a:buFontTx/>
-                        <a:buNone/>
-                        <a:tabLst/>
-                      </a:pPr>
                       <a:r>
-                        <a:rPr b="0" sz="1100">
+                        <a:rPr sz="1100" b="0">
                           <a:solidFill>
                             <a:srgbClr val="1A1A1A"/>
                           </a:solidFill>
@@ -4482,10 +4409,11 @@
           </a:bodyPr>
           <a:lstStyle/>
           <a:p>
-            <a:pPr hangingPunct="0"/>
             <a:r>
               <a:rPr sz="1400" b="1">
-                <a:latin typeface="Montserrat Bold"/>
+                <a:solidFill>
+                  <a:srgbClr val="1A1A1A"/>
+                </a:solidFill>
               </a:rPr>
               <a:t>ВЫВОД СУДА:</a:t>
             </a:r>
@@ -4493,7 +4421,9 @@
           <a:p>
             <a:r>
               <a:rPr sz="1300" b="0">
-                <a:latin typeface="Montserrat Bold"/>
+                <a:solidFill>
+                  <a:srgbClr val="1A1A1A"/>
+                </a:solidFill>
               </a:rPr>
               <a:t>Предписание ГИТ законно. Обстоятельства конфликта правового значения не имеют. НС на территории организации в рабочее время при необеспечении работодателем безопасности труда квалифицируется как связанный с производством.</a:t>
             </a:r>
@@ -4546,15 +4476,22 @@
           </a:bodyPr>
           <a:lstStyle/>
           <a:p>
-            <a:pPr algn="r"/>
-            <a:r>
-              <a:rPr sz="1200" b="0"/>
+            <a:r>
+              <a:rPr sz="1200" b="0">
+                <a:solidFill>
+                  <a:srgbClr val="1A1A1A"/>
+                </a:solidFill>
+              </a:rPr>
               <a:t>Определение Кемеровского областного суда</a:t>
             </a:r>
           </a:p>
           <a:p>
             <a:r>
-              <a:rPr sz="1200" b="0"/>
+              <a:rPr sz="1200" b="0">
+                <a:solidFill>
+                  <a:srgbClr val="1A1A1A"/>
+                </a:solidFill>
+              </a:rPr>
               <a:t>от 26 апреля 2023 г. по делу № 33а-3896/2023</a:t>
             </a:r>
           </a:p>
@@ -4635,7 +4572,7 @@
 </file>
 
 <file path=ppt/slides/slide2.xml><?xml version="1.0" encoding="utf-8"?>
-<p:sld xmlns:a="http://schemas.openxmlformats.org/drawingml/2006/main" xmlns:p="http://schemas.openxmlformats.org/presentationml/2006/main" xmlns:r="http://schemas.openxmlformats.org/officeDocument/2006/relationships">
+<p:sld xmlns:a="http://schemas.openxmlformats.org/drawingml/2006/main" xmlns:r="http://schemas.openxmlformats.org/officeDocument/2006/relationships" xmlns:p="http://schemas.openxmlformats.org/presentationml/2006/main">
   <p:cSld>
     <p:spTree>
       <p:nvGrpSpPr>
@@ -4643,6 +4580,14 @@
         <p:cNvGrpSpPr/>
         <p:nvPr/>
       </p:nvGrpSpPr>
+      <p:grpSpPr>
+        <a:xfrm>
+          <a:off x="0" y="0"/>
+          <a:ext cx="0" cy="0"/>
+          <a:chOff x="0" y="0"/>
+          <a:chExt cx="0" cy="0"/>
+        </a:xfrm>
+      </p:grpSpPr>
       <p:sp>
         <p:nvSpPr>
           <p:cNvPr id="149" name="Заголовок 1"/>
@@ -4675,16 +4620,14 @@
             </a:lvl1pPr>
           </a:lstStyle>
           <a:p>
-            <a:pPr>
-              <a:lnSpc>
-                <a:spcPct val="100000"/>
-              </a:lnSpc>
-            </a:pPr>
-            <a:r>
-              <a:rPr sz="1800" b="1"/>
+            <a:r>
+              <a:rPr sz="1800" b="1">
+                <a:solidFill>
+                  <a:srgbClr val="1A1A1A"/>
+                </a:solidFill>
+              </a:rPr>
               <a:t>ПОЗИЦИЯ СУДОВ ПО ВОПРОСУ квалификации драки в гардеробной как несчастного случая на производстве</a:t>
             </a:r>
-            <a:endParaRPr sz="1800" dirty="0"/>
           </a:p>
         </p:txBody>
       </p:sp>
@@ -4717,9 +4660,9 @@
           <a:lstStyle/>
           <a:p>
             <a:fld id="{86CB4B4D-7CA3-9044-876B-883B54F8677D}" type="slidenum">
+              <a:rPr sz="1400"/>
               <a:t>2</a:t>
             </a:fld>
-            <a:endParaRPr dirty="0"/>
           </a:p>
         </p:txBody>
       </p:sp>
@@ -4769,19 +4712,14 @@
           </a:bodyPr>
           <a:lstStyle/>
           <a:p>
-            <a:pPr hangingPunct="0"/>
             <a:r>
               <a:rPr sz="1300" b="0">
-                <a:latin typeface="Montserrat Bold"/>
+                <a:solidFill>
+                  <a:srgbClr val="1A1A1A"/>
+                </a:solidFill>
               </a:rPr>
               <a:t>СУТЬ ДЕЛА: Работники кондитерской фабрики им. Крупской подрались в гардеробной; причинён вред здоровью средней тяжести. Работодатель выдал акт Н-1, ФСС оспорил производственную квалификацию</a:t>
             </a:r>
-            <a:endParaRPr lang="ru-RU" sz="1600" dirty="0">
-              <a:solidFill>
-                <a:srgbClr val="000000"/>
-              </a:solidFill>
-              <a:sym typeface="Montserrat Regular"/>
-            </a:endParaRPr>
           </a:p>
         </p:txBody>
       </p:sp>
@@ -4837,31 +4775,14 @@
                     <a:bodyPr/>
                     <a:lstStyle/>
                     <a:p>
-                      <a:pPr algn="ctr">
-                        <a:lnSpc>
-                          <a:spcPct val="107000"/>
-                        </a:lnSpc>
-                        <a:spcAft>
-                          <a:spcPts val="800"/>
-                        </a:spcAft>
-                      </a:pPr>
                       <a:r>
-                        <a:rPr b="1" sz="1200">
+                        <a:rPr sz="1200" b="1">
                           <a:solidFill>
                             <a:srgbClr val="1A1A1A"/>
                           </a:solidFill>
                         </a:rPr>
                         <a:t>Позиция ФСС</a:t>
                       </a:r>
-                      <a:endParaRPr lang="ru-RU" sz="1600" kern="100" dirty="0">
-                        <a:solidFill>
-                          <a:schemeClr val="bg1"/>
-                        </a:solidFill>
-                        <a:effectLst/>
-                        <a:latin typeface="Montserrat Bold" panose="00000800000000000000" pitchFamily="2" charset="-52"/>
-                        <a:ea typeface="Aptos" panose="020B0004020202020204" pitchFamily="34" charset="0"/>
-                        <a:cs typeface="Times New Roman" panose="02020603050405020304" pitchFamily="18" charset="0"/>
-                      </a:endParaRPr>
                     </a:p>
                   </a:txBody>
                   <a:tcPr marL="0" marR="76200" marT="47625" marB="47625" anchor="ctr">
@@ -4877,31 +4798,14 @@
                     <a:bodyPr/>
                     <a:lstStyle/>
                     <a:p>
-                      <a:pPr algn="ctr">
-                        <a:lnSpc>
-                          <a:spcPct val="107000"/>
-                        </a:lnSpc>
-                        <a:spcAft>
-                          <a:spcPts val="800"/>
-                        </a:spcAft>
-                      </a:pPr>
                       <a:r>
-                        <a:rPr b="1" sz="1200">
+                        <a:rPr sz="1200" b="1">
                           <a:solidFill>
                             <a:srgbClr val="1A1A1A"/>
                           </a:solidFill>
                         </a:rPr>
                         <a:t>Позиция работодателя</a:t>
                       </a:r>
-                      <a:endParaRPr lang="ru-RU" sz="1600" kern="100" dirty="0">
-                        <a:solidFill>
-                          <a:schemeClr val="bg1"/>
-                        </a:solidFill>
-                        <a:effectLst/>
-                        <a:latin typeface="Montserrat Bold" panose="00000800000000000000" pitchFamily="2" charset="-52"/>
-                        <a:ea typeface="Aptos" panose="020B0004020202020204" pitchFamily="34" charset="0"/>
-                        <a:cs typeface="Times New Roman" panose="02020603050405020304" pitchFamily="18" charset="0"/>
-                      </a:endParaRPr>
                     </a:p>
                   </a:txBody>
                   <a:tcPr marL="76200" marR="76200" marT="47625" marB="47625" anchor="ctr">
@@ -4924,24 +4828,8 @@
                     <a:bodyPr/>
                     <a:lstStyle/>
                     <a:p>
-                      <a:pPr marL="0" marR="0" indent="0" algn="l" defTabSz="1828800" rtl="0" latinLnBrk="0">
-                        <a:lnSpc>
-                          <a:spcPct val="107000"/>
-                        </a:lnSpc>
-                        <a:spcBef>
-                          <a:spcPts val="0"/>
-                        </a:spcBef>
-                        <a:spcAft>
-                          <a:spcPts val="800"/>
-                        </a:spcAft>
-                        <a:buClrTx/>
-                        <a:buSzTx/>
-                        <a:buFontTx/>
-                        <a:buNone/>
-                        <a:tabLst/>
-                      </a:pPr>
                       <a:r>
-                        <a:rPr b="0" sz="1100">
+                        <a:rPr sz="1100" b="0">
                           <a:solidFill>
                             <a:srgbClr val="1A1A1A"/>
                           </a:solidFill>
@@ -4957,24 +4845,8 @@
                     <a:bodyPr/>
                     <a:lstStyle/>
                     <a:p>
-                      <a:pPr marL="0" marR="0" indent="0" algn="l" defTabSz="1828800" rtl="0" latinLnBrk="0">
-                        <a:lnSpc>
-                          <a:spcPct val="107000"/>
-                        </a:lnSpc>
-                        <a:spcBef>
-                          <a:spcPts val="0"/>
-                        </a:spcBef>
-                        <a:spcAft>
-                          <a:spcPts val="800"/>
-                        </a:spcAft>
-                        <a:buClrTx/>
-                        <a:buSzTx/>
-                        <a:buFontTx/>
-                        <a:buNone/>
-                        <a:tabLst/>
-                      </a:pPr>
                       <a:r>
-                        <a:rPr b="0" sz="1100">
+                        <a:rPr sz="1100" b="0">
                           <a:solidFill>
                             <a:srgbClr val="1A1A1A"/>
                           </a:solidFill>
@@ -5041,10 +4913,11 @@
           </a:bodyPr>
           <a:lstStyle/>
           <a:p>
-            <a:pPr hangingPunct="0"/>
             <a:r>
               <a:rPr sz="1400" b="1">
-                <a:latin typeface="Montserrat Bold"/>
+                <a:solidFill>
+                  <a:srgbClr val="1A1A1A"/>
+                </a:solidFill>
               </a:rPr>
               <a:t>ВЫВОД СУДА:</a:t>
             </a:r>
@@ -5052,7 +4925,9 @@
           <a:p>
             <a:r>
               <a:rPr sz="1300" b="0">
-                <a:latin typeface="Montserrat Bold"/>
+                <a:solidFill>
+                  <a:srgbClr val="1A1A1A"/>
+                </a:solidFill>
               </a:rPr>
               <a:t>По обзорам практики: травма в драке вследствие нарушения дисциплины не признана производственным НС. Практика по дракам на территории неоднородна (сравните с делом Кемерово № 33а-3896/2023).</a:t>
             </a:r>
@@ -5105,15 +4980,22 @@
           </a:bodyPr>
           <a:lstStyle/>
           <a:p>
-            <a:pPr algn="r"/>
-            <a:r>
-              <a:rPr sz="1200" b="0"/>
+            <a:r>
+              <a:rPr sz="1200" b="0">
+                <a:solidFill>
+                  <a:srgbClr val="1A1A1A"/>
+                </a:solidFill>
+              </a:rPr>
               <a:t>Кассационное определение Санкт-Петербургского городского суда</a:t>
             </a:r>
           </a:p>
           <a:p>
             <a:r>
-              <a:rPr sz="1200" b="0"/>
+              <a:rPr sz="1200" b="0">
+                <a:solidFill>
+                  <a:srgbClr val="1A1A1A"/>
+                </a:solidFill>
+              </a:rPr>
               <a:t>от 16 января 2012 г. по делу № 33-13/2012</a:t>
             </a:r>
           </a:p>
@@ -5125,36 +5007,6 @@
             <a:extLst>
               <a:ext uri="{FF2B5EF4-FFF2-40B4-BE49-F238E27FC236}">
                 <a16:creationId xmlns:a16="http://schemas.microsoft.com/office/drawing/2014/main" id="{45333F64-5F15-55F5-A25A-B38B3CDAB602}"/>
-              </a:ext>
-            </a:extLst>
-          </p:cNvPr>
-          <p:cNvPicPr>
-            <a:picLocks noChangeAspect="1"/>
-          </p:cNvPicPr>
-          <p:nvPr/>
-        </p:nvPicPr>
-        <p:blipFill>
-          <a:blip r:embed="rId2"/>
-          <a:stretch>
-            <a:fillRect/>
-          </a:stretch>
-        </p:blipFill>
-        <p:spPr>
-          <a:xfrm>
-            <a:off x="331744" y="1686216"/>
-            <a:ext cx="671406" cy="671406"/>
-          </a:xfrm>
-          <a:prstGeom prst="rect">
-            <a:avLst/>
-          </a:prstGeom>
-        </p:spPr>
-      </p:pic>
-      <p:pic>
-        <p:nvPicPr>
-          <p:cNvPr id="7" name="Рисунок 6">
-            <a:extLst>
-              <a:ext uri="{FF2B5EF4-FFF2-40B4-BE49-F238E27FC236}">
-                <a16:creationId xmlns:a16="http://schemas.microsoft.com/office/drawing/2014/main" id="{FC8254E8-FE29-BD45-40F0-A01355EE1EB8}"/>
               </a:ext>
             </a:extLst>
           </p:cNvPr>
@@ -5171,25 +5023,60 @@
         </p:blipFill>
         <p:spPr>
           <a:xfrm>
-            <a:off x="331744" y="4743278"/>
-            <a:ext cx="1048616" cy="1048616"/>
+            <a:off x="331744" y="1686216"/>
+            <a:ext cx="671406" cy="671406"/>
           </a:xfrm>
           <a:prstGeom prst="rect">
             <a:avLst/>
           </a:prstGeom>
         </p:spPr>
       </p:pic>
-      <p:grpSpPr/>
+      <p:pic>
+        <p:nvPicPr>
+          <p:cNvPr id="7" name="Рисунок 6">
+            <a:extLst>
+              <a:ext uri="{FF2B5EF4-FFF2-40B4-BE49-F238E27FC236}">
+                <a16:creationId xmlns:a16="http://schemas.microsoft.com/office/drawing/2014/main" id="{FC8254E8-FE29-BD45-40F0-A01355EE1EB8}"/>
+              </a:ext>
+            </a:extLst>
+          </p:cNvPr>
+          <p:cNvPicPr>
+            <a:picLocks noChangeAspect="1"/>
+          </p:cNvPicPr>
+          <p:nvPr/>
+        </p:nvPicPr>
+        <p:blipFill>
+          <a:blip r:embed="rId4"/>
+          <a:stretch>
+            <a:fillRect/>
+          </a:stretch>
+        </p:blipFill>
+        <p:spPr>
+          <a:xfrm>
+            <a:off x="331744" y="4743278"/>
+            <a:ext cx="1048616" cy="1048616"/>
+          </a:xfrm>
+          <a:prstGeom prst="rect">
+            <a:avLst/>
+          </a:prstGeom>
+        </p:spPr>
+      </p:pic>
     </p:spTree>
+    <p:extLst>
+      <p:ext uri="{BB962C8B-B14F-4D97-AF65-F5344CB8AC3E}">
+        <p14:creationId xmlns:p14="http://schemas.microsoft.com/office/powerpoint/2010/main" val="3505820384"/>
+      </p:ext>
+    </p:extLst>
   </p:cSld>
   <p:clrMapOvr>
     <a:masterClrMapping/>
   </p:clrMapOvr>
+  <p:transition spd="med"/>
 </p:sld>
 </file>
 
 <file path=ppt/slides/slide3.xml><?xml version="1.0" encoding="utf-8"?>
-<p:sld xmlns:a="http://schemas.openxmlformats.org/drawingml/2006/main" xmlns:p="http://schemas.openxmlformats.org/presentationml/2006/main" xmlns:r="http://schemas.openxmlformats.org/officeDocument/2006/relationships">
+<p:sld xmlns:a="http://schemas.openxmlformats.org/drawingml/2006/main" xmlns:r="http://schemas.openxmlformats.org/officeDocument/2006/relationships" xmlns:p="http://schemas.openxmlformats.org/presentationml/2006/main">
   <p:cSld>
     <p:spTree>
       <p:nvGrpSpPr>
@@ -5197,6 +5084,14 @@
         <p:cNvGrpSpPr/>
         <p:nvPr/>
       </p:nvGrpSpPr>
+      <p:grpSpPr>
+        <a:xfrm>
+          <a:off x="0" y="0"/>
+          <a:ext cx="0" cy="0"/>
+          <a:chOff x="0" y="0"/>
+          <a:chExt cx="0" cy="0"/>
+        </a:xfrm>
+      </p:grpSpPr>
       <p:sp>
         <p:nvSpPr>
           <p:cNvPr id="149" name="Заголовок 1"/>
@@ -5229,16 +5124,14 @@
             </a:lvl1pPr>
           </a:lstStyle>
           <a:p>
-            <a:pPr>
-              <a:lnSpc>
-                <a:spcPct val="100000"/>
-              </a:lnSpc>
-            </a:pPr>
-            <a:r>
-              <a:rPr sz="2000" b="1"/>
+            <a:r>
+              <a:rPr sz="2000" b="1">
+                <a:solidFill>
+                  <a:srgbClr val="1A1A1A"/>
+                </a:solidFill>
+              </a:rPr>
               <a:t>ПОЗИЦИЯ СУДОВ ПО ВОПРОСУ ответственности работодателя за ожог от офисного чайника</a:t>
             </a:r>
-            <a:endParaRPr sz="1800" dirty="0"/>
           </a:p>
         </p:txBody>
       </p:sp>
@@ -5271,9 +5164,9 @@
           <a:lstStyle/>
           <a:p>
             <a:fld id="{86CB4B4D-7CA3-9044-876B-883B54F8677D}" type="slidenum">
+              <a:rPr sz="1400"/>
               <a:t>3</a:t>
             </a:fld>
-            <a:endParaRPr dirty="0"/>
           </a:p>
         </p:txBody>
       </p:sp>
@@ -5323,19 +5216,14 @@
           </a:bodyPr>
           <a:lstStyle/>
           <a:p>
-            <a:pPr hangingPunct="0"/>
             <a:r>
               <a:rPr sz="1300" b="0">
-                <a:latin typeface="Montserrat Bold"/>
+                <a:solidFill>
+                  <a:srgbClr val="1A1A1A"/>
+                </a:solidFill>
               </a:rPr>
               <a:t>СУТЬ ДЕЛА: Порыв ветра распахнул окно, чайник с подоконника опрокинулся на работницу; термические ожоги, около 3 месяцев нетрудоспособности. Работодатель указывал на личную неосторожность</a:t>
             </a:r>
-            <a:endParaRPr lang="ru-RU" sz="1600" dirty="0">
-              <a:solidFill>
-                <a:srgbClr val="000000"/>
-              </a:solidFill>
-              <a:sym typeface="Montserrat Regular"/>
-            </a:endParaRPr>
           </a:p>
         </p:txBody>
       </p:sp>
@@ -5391,31 +5279,14 @@
                     <a:bodyPr/>
                     <a:lstStyle/>
                     <a:p>
-                      <a:pPr algn="ctr">
-                        <a:lnSpc>
-                          <a:spcPct val="107000"/>
-                        </a:lnSpc>
-                        <a:spcAft>
-                          <a:spcPts val="800"/>
-                        </a:spcAft>
-                      </a:pPr>
                       <a:r>
-                        <a:rPr b="1" sz="1200">
+                        <a:rPr sz="1200" b="1">
                           <a:solidFill>
                             <a:srgbClr val="1A1A1A"/>
                           </a:solidFill>
                         </a:rPr>
                         <a:t>Позиция работницы</a:t>
                       </a:r>
-                      <a:endParaRPr lang="ru-RU" sz="1600" kern="100" dirty="0">
-                        <a:solidFill>
-                          <a:schemeClr val="bg1"/>
-                        </a:solidFill>
-                        <a:effectLst/>
-                        <a:latin typeface="Montserrat Bold" panose="00000800000000000000" pitchFamily="2" charset="-52"/>
-                        <a:ea typeface="Aptos" panose="020B0004020202020204" pitchFamily="34" charset="0"/>
-                        <a:cs typeface="Times New Roman" panose="02020603050405020304" pitchFamily="18" charset="0"/>
-                      </a:endParaRPr>
                     </a:p>
                   </a:txBody>
                   <a:tcPr marL="0" marR="76200" marT="47625" marB="47625" anchor="ctr">
@@ -5431,31 +5302,14 @@
                     <a:bodyPr/>
                     <a:lstStyle/>
                     <a:p>
-                      <a:pPr algn="ctr">
-                        <a:lnSpc>
-                          <a:spcPct val="107000"/>
-                        </a:lnSpc>
-                        <a:spcAft>
-                          <a:spcPts val="800"/>
-                        </a:spcAft>
-                      </a:pPr>
                       <a:r>
-                        <a:rPr b="1" sz="1200">
+                        <a:rPr sz="1200" b="1">
                           <a:solidFill>
                             <a:srgbClr val="1A1A1A"/>
                           </a:solidFill>
                         </a:rPr>
                         <a:t>Позиция работодателя</a:t>
                       </a:r>
-                      <a:endParaRPr lang="ru-RU" sz="1600" kern="100" dirty="0">
-                        <a:solidFill>
-                          <a:schemeClr val="bg1"/>
-                        </a:solidFill>
-                        <a:effectLst/>
-                        <a:latin typeface="Montserrat Bold" panose="00000800000000000000" pitchFamily="2" charset="-52"/>
-                        <a:ea typeface="Aptos" panose="020B0004020202020204" pitchFamily="34" charset="0"/>
-                        <a:cs typeface="Times New Roman" panose="02020603050405020304" pitchFamily="18" charset="0"/>
-                      </a:endParaRPr>
                     </a:p>
                   </a:txBody>
                   <a:tcPr marL="76200" marR="76200" marT="47625" marB="47625" anchor="ctr">
@@ -5478,24 +5332,8 @@
                     <a:bodyPr/>
                     <a:lstStyle/>
                     <a:p>
-                      <a:pPr marL="0" marR="0" indent="0" algn="l" defTabSz="1828800" rtl="0" latinLnBrk="0">
-                        <a:lnSpc>
-                          <a:spcPct val="107000"/>
-                        </a:lnSpc>
-                        <a:spcBef>
-                          <a:spcPts val="0"/>
-                        </a:spcBef>
-                        <a:spcAft>
-                          <a:spcPts val="800"/>
-                        </a:spcAft>
-                        <a:buClrTx/>
-                        <a:buSzTx/>
-                        <a:buFontTx/>
-                        <a:buNone/>
-                        <a:tabLst/>
-                      </a:pPr>
                       <a:r>
-                        <a:rPr b="0" sz="1100">
+                        <a:rPr sz="1100" b="0">
                           <a:solidFill>
                             <a:srgbClr val="1A1A1A"/>
                           </a:solidFill>
@@ -5511,24 +5349,8 @@
                     <a:bodyPr/>
                     <a:lstStyle/>
                     <a:p>
-                      <a:pPr marL="0" marR="0" indent="0" algn="l" defTabSz="1828800" rtl="0" latinLnBrk="0">
-                        <a:lnSpc>
-                          <a:spcPct val="107000"/>
-                        </a:lnSpc>
-                        <a:spcBef>
-                          <a:spcPts val="0"/>
-                        </a:spcBef>
-                        <a:spcAft>
-                          <a:spcPts val="800"/>
-                        </a:spcAft>
-                        <a:buClrTx/>
-                        <a:buSzTx/>
-                        <a:buFontTx/>
-                        <a:buNone/>
-                        <a:tabLst/>
-                      </a:pPr>
                       <a:r>
-                        <a:rPr b="0" sz="1100">
+                        <a:rPr sz="1100" b="0">
                           <a:solidFill>
                             <a:srgbClr val="1A1A1A"/>
                           </a:solidFill>
@@ -5595,10 +5417,11 @@
           </a:bodyPr>
           <a:lstStyle/>
           <a:p>
-            <a:pPr hangingPunct="0"/>
             <a:r>
               <a:rPr sz="1400" b="1">
-                <a:latin typeface="Montserrat Bold"/>
+                <a:solidFill>
+                  <a:srgbClr val="1A1A1A"/>
+                </a:solidFill>
               </a:rPr>
               <a:t>ВЫВОД СУДА:</a:t>
             </a:r>
@@ -5606,7 +5429,9 @@
           <a:p>
             <a:r>
               <a:rPr sz="1300" b="0">
-                <a:latin typeface="Montserrat Bold"/>
+                <a:solidFill>
+                  <a:srgbClr val="1A1A1A"/>
+                </a:solidFill>
               </a:rPr>
               <a:t>Производственная травма подтверждена. Вина работодателя — в отсутствии контроля за использованием электроприборов, не относящихся к рабочей технике. Взыскана компенсация морального вреда 300 000 руб.</a:t>
             </a:r>
@@ -5659,15 +5484,22 @@
           </a:bodyPr>
           <a:lstStyle/>
           <a:p>
-            <a:pPr algn="r"/>
-            <a:r>
-              <a:rPr sz="1200" b="0"/>
+            <a:r>
+              <a:rPr sz="1200" b="0">
+                <a:solidFill>
+                  <a:srgbClr val="1A1A1A"/>
+                </a:solidFill>
+              </a:rPr>
               <a:t>Определение Девятого кассационного суда общей юрисдикции</a:t>
             </a:r>
           </a:p>
           <a:p>
             <a:r>
-              <a:rPr sz="1200" b="0"/>
+              <a:rPr sz="1200" b="0">
+                <a:solidFill>
+                  <a:srgbClr val="1A1A1A"/>
+                </a:solidFill>
+              </a:rPr>
               <a:t>от 23 апреля 2026 г. по делу № 8Г-3005/2026</a:t>
             </a:r>
           </a:p>
@@ -5679,36 +5511,6 @@
             <a:extLst>
               <a:ext uri="{FF2B5EF4-FFF2-40B4-BE49-F238E27FC236}">
                 <a16:creationId xmlns:a16="http://schemas.microsoft.com/office/drawing/2014/main" id="{45333F64-5F15-55F5-A25A-B38B3CDAB602}"/>
-              </a:ext>
-            </a:extLst>
-          </p:cNvPr>
-          <p:cNvPicPr>
-            <a:picLocks noChangeAspect="1"/>
-          </p:cNvPicPr>
-          <p:nvPr/>
-        </p:nvPicPr>
-        <p:blipFill>
-          <a:blip r:embed="rId2"/>
-          <a:stretch>
-            <a:fillRect/>
-          </a:stretch>
-        </p:blipFill>
-        <p:spPr>
-          <a:xfrm>
-            <a:off x="331744" y="1686216"/>
-            <a:ext cx="671406" cy="671406"/>
-          </a:xfrm>
-          <a:prstGeom prst="rect">
-            <a:avLst/>
-          </a:prstGeom>
-        </p:spPr>
-      </p:pic>
-      <p:pic>
-        <p:nvPicPr>
-          <p:cNvPr id="7" name="Рисунок 6">
-            <a:extLst>
-              <a:ext uri="{FF2B5EF4-FFF2-40B4-BE49-F238E27FC236}">
-                <a16:creationId xmlns:a16="http://schemas.microsoft.com/office/drawing/2014/main" id="{FC8254E8-FE29-BD45-40F0-A01355EE1EB8}"/>
               </a:ext>
             </a:extLst>
           </p:cNvPr>
@@ -5725,25 +5527,60 @@
         </p:blipFill>
         <p:spPr>
           <a:xfrm>
-            <a:off x="331744" y="4743278"/>
-            <a:ext cx="1048616" cy="1048616"/>
+            <a:off x="331744" y="1686216"/>
+            <a:ext cx="671406" cy="671406"/>
           </a:xfrm>
           <a:prstGeom prst="rect">
             <a:avLst/>
           </a:prstGeom>
         </p:spPr>
       </p:pic>
-      <p:grpSpPr/>
+      <p:pic>
+        <p:nvPicPr>
+          <p:cNvPr id="7" name="Рисунок 6">
+            <a:extLst>
+              <a:ext uri="{FF2B5EF4-FFF2-40B4-BE49-F238E27FC236}">
+                <a16:creationId xmlns:a16="http://schemas.microsoft.com/office/drawing/2014/main" id="{FC8254E8-FE29-BD45-40F0-A01355EE1EB8}"/>
+              </a:ext>
+            </a:extLst>
+          </p:cNvPr>
+          <p:cNvPicPr>
+            <a:picLocks noChangeAspect="1"/>
+          </p:cNvPicPr>
+          <p:nvPr/>
+        </p:nvPicPr>
+        <p:blipFill>
+          <a:blip r:embed="rId4"/>
+          <a:stretch>
+            <a:fillRect/>
+          </a:stretch>
+        </p:blipFill>
+        <p:spPr>
+          <a:xfrm>
+            <a:off x="331744" y="4743278"/>
+            <a:ext cx="1048616" cy="1048616"/>
+          </a:xfrm>
+          <a:prstGeom prst="rect">
+            <a:avLst/>
+          </a:prstGeom>
+        </p:spPr>
+      </p:pic>
     </p:spTree>
+    <p:extLst>
+      <p:ext uri="{BB962C8B-B14F-4D97-AF65-F5344CB8AC3E}">
+        <p14:creationId xmlns:p14="http://schemas.microsoft.com/office/powerpoint/2010/main" val="3505820384"/>
+      </p:ext>
+    </p:extLst>
   </p:cSld>
   <p:clrMapOvr>
     <a:masterClrMapping/>
   </p:clrMapOvr>
+  <p:transition spd="med"/>
 </p:sld>
 </file>
 
 <file path=ppt/slides/slide4.xml><?xml version="1.0" encoding="utf-8"?>
-<p:sld xmlns:a="http://schemas.openxmlformats.org/drawingml/2006/main" xmlns:p="http://schemas.openxmlformats.org/presentationml/2006/main" xmlns:r="http://schemas.openxmlformats.org/officeDocument/2006/relationships">
+<p:sld xmlns:a="http://schemas.openxmlformats.org/drawingml/2006/main" xmlns:r="http://schemas.openxmlformats.org/officeDocument/2006/relationships" xmlns:p="http://schemas.openxmlformats.org/presentationml/2006/main">
   <p:cSld>
     <p:spTree>
       <p:nvGrpSpPr>
@@ -5751,6 +5588,14 @@
         <p:cNvGrpSpPr/>
         <p:nvPr/>
       </p:nvGrpSpPr>
+      <p:grpSpPr>
+        <a:xfrm>
+          <a:off x="0" y="0"/>
+          <a:ext cx="0" cy="0"/>
+          <a:chOff x="0" y="0"/>
+          <a:chExt cx="0" cy="0"/>
+        </a:xfrm>
+      </p:grpSpPr>
       <p:sp>
         <p:nvSpPr>
           <p:cNvPr id="149" name="Заголовок 1"/>
@@ -5783,16 +5628,14 @@
             </a:lvl1pPr>
           </a:lstStyle>
           <a:p>
-            <a:pPr>
-              <a:lnSpc>
-                <a:spcPct val="100000"/>
-              </a:lnSpc>
-            </a:pPr>
-            <a:r>
-              <a:rPr sz="2000" b="1"/>
+            <a:r>
+              <a:rPr sz="2000" b="1">
+                <a:solidFill>
+                  <a:srgbClr val="1A1A1A"/>
+                </a:solidFill>
+              </a:rPr>
               <a:t>ПОЗИЦИЯ СУДОВ ПО ВОПРОСУ признания смерти от ОРВИ несчастным случаем на производстве</a:t>
             </a:r>
-            <a:endParaRPr sz="1800" dirty="0"/>
           </a:p>
         </p:txBody>
       </p:sp>
@@ -5825,9 +5668,9 @@
           <a:lstStyle/>
           <a:p>
             <a:fld id="{86CB4B4D-7CA3-9044-876B-883B54F8677D}" type="slidenum">
+              <a:rPr sz="1400"/>
               <a:t>4</a:t>
             </a:fld>
-            <a:endParaRPr dirty="0"/>
           </a:p>
         </p:txBody>
       </p:sp>
@@ -5877,19 +5720,14 @@
           </a:bodyPr>
           <a:lstStyle/>
           <a:p>
-            <a:pPr hangingPunct="0"/>
             <a:r>
               <a:rPr sz="1200" b="0">
-                <a:latin typeface="Montserrat Bold"/>
+                <a:solidFill>
+                  <a:srgbClr val="1A1A1A"/>
+                </a:solidFill>
               </a:rPr>
               <a:t>СУТЬ ДЕЛА: Водитель ООО «РН-Транспорт» умер на базе после допуска к работе (ОРВИ, пневмония). Работал 35 дней без еженедельного отдыха, без периодического медосмотра. Комиссия оформила Н-1; нижестоящие суды отказали семье, опираясь на СМЭ</a:t>
             </a:r>
-            <a:endParaRPr lang="ru-RU" sz="1600" dirty="0">
-              <a:solidFill>
-                <a:srgbClr val="000000"/>
-              </a:solidFill>
-              <a:sym typeface="Montserrat Regular"/>
-            </a:endParaRPr>
           </a:p>
         </p:txBody>
       </p:sp>
@@ -5945,31 +5783,14 @@
                     <a:bodyPr/>
                     <a:lstStyle/>
                     <a:p>
-                      <a:pPr algn="ctr">
-                        <a:lnSpc>
-                          <a:spcPct val="107000"/>
-                        </a:lnSpc>
-                        <a:spcAft>
-                          <a:spcPts val="800"/>
-                        </a:spcAft>
-                      </a:pPr>
                       <a:r>
-                        <a:rPr b="1" sz="1200">
+                        <a:rPr sz="1200" b="1">
                           <a:solidFill>
                             <a:srgbClr val="1A1A1A"/>
                           </a:solidFill>
                         </a:rPr>
                         <a:t>Позиция семьи погибшего</a:t>
                       </a:r>
-                      <a:endParaRPr lang="ru-RU" sz="1600" kern="100" dirty="0">
-                        <a:solidFill>
-                          <a:schemeClr val="bg1"/>
-                        </a:solidFill>
-                        <a:effectLst/>
-                        <a:latin typeface="Montserrat Bold" panose="00000800000000000000" pitchFamily="2" charset="-52"/>
-                        <a:ea typeface="Aptos" panose="020B0004020202020204" pitchFamily="34" charset="0"/>
-                        <a:cs typeface="Times New Roman" panose="02020603050405020304" pitchFamily="18" charset="0"/>
-                      </a:endParaRPr>
                     </a:p>
                   </a:txBody>
                   <a:tcPr marL="0" marR="76200" marT="47625" marB="47625" anchor="ctr">
@@ -5985,31 +5806,14 @@
                     <a:bodyPr/>
                     <a:lstStyle/>
                     <a:p>
-                      <a:pPr algn="ctr">
-                        <a:lnSpc>
-                          <a:spcPct val="107000"/>
-                        </a:lnSpc>
-                        <a:spcAft>
-                          <a:spcPts val="800"/>
-                        </a:spcAft>
-                      </a:pPr>
                       <a:r>
-                        <a:rPr b="1" sz="1200">
+                        <a:rPr sz="1200" b="1">
                           <a:solidFill>
                             <a:srgbClr val="1A1A1A"/>
                           </a:solidFill>
                         </a:rPr>
                         <a:t>Позиция работодателя / нижестоящих судов</a:t>
                       </a:r>
-                      <a:endParaRPr lang="ru-RU" sz="1600" kern="100" dirty="0">
-                        <a:solidFill>
-                          <a:schemeClr val="bg1"/>
-                        </a:solidFill>
-                        <a:effectLst/>
-                        <a:latin typeface="Montserrat Bold" panose="00000800000000000000" pitchFamily="2" charset="-52"/>
-                        <a:ea typeface="Aptos" panose="020B0004020202020204" pitchFamily="34" charset="0"/>
-                        <a:cs typeface="Times New Roman" panose="02020603050405020304" pitchFamily="18" charset="0"/>
-                      </a:endParaRPr>
                     </a:p>
                   </a:txBody>
                   <a:tcPr marL="76200" marR="76200" marT="47625" marB="47625" anchor="ctr">
@@ -6032,24 +5836,8 @@
                     <a:bodyPr/>
                     <a:lstStyle/>
                     <a:p>
-                      <a:pPr marL="0" marR="0" indent="0" algn="l" defTabSz="1828800" rtl="0" latinLnBrk="0">
-                        <a:lnSpc>
-                          <a:spcPct val="107000"/>
-                        </a:lnSpc>
-                        <a:spcBef>
-                          <a:spcPts val="0"/>
-                        </a:spcBef>
-                        <a:spcAft>
-                          <a:spcPts val="800"/>
-                        </a:spcAft>
-                        <a:buClrTx/>
-                        <a:buSzTx/>
-                        <a:buFontTx/>
-                        <a:buNone/>
-                        <a:tabLst/>
-                      </a:pPr>
                       <a:r>
-                        <a:rPr b="0" sz="1100">
+                        <a:rPr sz="1100" b="0">
                           <a:solidFill>
                             <a:srgbClr val="1A1A1A"/>
                           </a:solidFill>
@@ -6065,24 +5853,8 @@
                     <a:bodyPr/>
                     <a:lstStyle/>
                     <a:p>
-                      <a:pPr marL="0" marR="0" indent="0" algn="l" defTabSz="1828800" rtl="0" latinLnBrk="0">
-                        <a:lnSpc>
-                          <a:spcPct val="107000"/>
-                        </a:lnSpc>
-                        <a:spcBef>
-                          <a:spcPts val="0"/>
-                        </a:spcBef>
-                        <a:spcAft>
-                          <a:spcPts val="800"/>
-                        </a:spcAft>
-                        <a:buClrTx/>
-                        <a:buSzTx/>
-                        <a:buFontTx/>
-                        <a:buNone/>
-                        <a:tabLst/>
-                      </a:pPr>
                       <a:r>
-                        <a:rPr b="0" sz="1100">
+                        <a:rPr sz="1100" b="0">
                           <a:solidFill>
                             <a:srgbClr val="1A1A1A"/>
                           </a:solidFill>
@@ -6149,10 +5921,11 @@
           </a:bodyPr>
           <a:lstStyle/>
           <a:p>
-            <a:pPr hangingPunct="0"/>
             <a:r>
               <a:rPr sz="1400" b="1">
-                <a:latin typeface="Montserrat Bold"/>
+                <a:solidFill>
+                  <a:srgbClr val="1A1A1A"/>
+                </a:solidFill>
               </a:rPr>
               <a:t>ВЫВОД СУДА:</a:t>
             </a:r>
@@ -6160,7 +5933,9 @@
           <a:p>
             <a:r>
               <a:rPr sz="1300" b="0">
-                <a:latin typeface="Montserrat Bold"/>
+                <a:solidFill>
+                  <a:srgbClr val="1A1A1A"/>
+                </a:solidFill>
               </a:rPr>
               <a:t>ВС отменил отказы и направил дело на новое рассмотрение. «Умер от болезни» не закрывает вопрос автоматически. Заключение эксперта не единственное доказательство; нужно оценить Н-1, позицию ГИТ и нарушения ОТ/режима.</a:t>
             </a:r>
@@ -6213,15 +5988,22 @@
           </a:bodyPr>
           <a:lstStyle/>
           <a:p>
-            <a:pPr algn="r"/>
-            <a:r>
-              <a:rPr sz="1200" b="0"/>
+            <a:r>
+              <a:rPr sz="1200" b="0">
+                <a:solidFill>
+                  <a:srgbClr val="1A1A1A"/>
+                </a:solidFill>
+              </a:rPr>
               <a:t>Определение Верховного Суда РФ</a:t>
             </a:r>
           </a:p>
           <a:p>
             <a:r>
-              <a:rPr sz="1200" b="0"/>
+              <a:rPr sz="1200" b="0">
+                <a:solidFill>
+                  <a:srgbClr val="1A1A1A"/>
+                </a:solidFill>
+              </a:rPr>
               <a:t>от 22 июля 2024 г. № 88-КГ24-6-К8</a:t>
             </a:r>
           </a:p>
@@ -6233,36 +6015,6 @@
             <a:extLst>
               <a:ext uri="{FF2B5EF4-FFF2-40B4-BE49-F238E27FC236}">
                 <a16:creationId xmlns:a16="http://schemas.microsoft.com/office/drawing/2014/main" id="{45333F64-5F15-55F5-A25A-B38B3CDAB602}"/>
-              </a:ext>
-            </a:extLst>
-          </p:cNvPr>
-          <p:cNvPicPr>
-            <a:picLocks noChangeAspect="1"/>
-          </p:cNvPicPr>
-          <p:nvPr/>
-        </p:nvPicPr>
-        <p:blipFill>
-          <a:blip r:embed="rId2"/>
-          <a:stretch>
-            <a:fillRect/>
-          </a:stretch>
-        </p:blipFill>
-        <p:spPr>
-          <a:xfrm>
-            <a:off x="331744" y="1686216"/>
-            <a:ext cx="671406" cy="671406"/>
-          </a:xfrm>
-          <a:prstGeom prst="rect">
-            <a:avLst/>
-          </a:prstGeom>
-        </p:spPr>
-      </p:pic>
-      <p:pic>
-        <p:nvPicPr>
-          <p:cNvPr id="7" name="Рисунок 6">
-            <a:extLst>
-              <a:ext uri="{FF2B5EF4-FFF2-40B4-BE49-F238E27FC236}">
-                <a16:creationId xmlns:a16="http://schemas.microsoft.com/office/drawing/2014/main" id="{FC8254E8-FE29-BD45-40F0-A01355EE1EB8}"/>
               </a:ext>
             </a:extLst>
           </p:cNvPr>
@@ -6279,25 +6031,60 @@
         </p:blipFill>
         <p:spPr>
           <a:xfrm>
-            <a:off x="331744" y="4743278"/>
-            <a:ext cx="1048616" cy="1048616"/>
+            <a:off x="331744" y="1686216"/>
+            <a:ext cx="671406" cy="671406"/>
           </a:xfrm>
           <a:prstGeom prst="rect">
             <a:avLst/>
           </a:prstGeom>
         </p:spPr>
       </p:pic>
-      <p:grpSpPr/>
+      <p:pic>
+        <p:nvPicPr>
+          <p:cNvPr id="7" name="Рисунок 6">
+            <a:extLst>
+              <a:ext uri="{FF2B5EF4-FFF2-40B4-BE49-F238E27FC236}">
+                <a16:creationId xmlns:a16="http://schemas.microsoft.com/office/drawing/2014/main" id="{FC8254E8-FE29-BD45-40F0-A01355EE1EB8}"/>
+              </a:ext>
+            </a:extLst>
+          </p:cNvPr>
+          <p:cNvPicPr>
+            <a:picLocks noChangeAspect="1"/>
+          </p:cNvPicPr>
+          <p:nvPr/>
+        </p:nvPicPr>
+        <p:blipFill>
+          <a:blip r:embed="rId4"/>
+          <a:stretch>
+            <a:fillRect/>
+          </a:stretch>
+        </p:blipFill>
+        <p:spPr>
+          <a:xfrm>
+            <a:off x="331744" y="4743278"/>
+            <a:ext cx="1048616" cy="1048616"/>
+          </a:xfrm>
+          <a:prstGeom prst="rect">
+            <a:avLst/>
+          </a:prstGeom>
+        </p:spPr>
+      </p:pic>
     </p:spTree>
+    <p:extLst>
+      <p:ext uri="{BB962C8B-B14F-4D97-AF65-F5344CB8AC3E}">
+        <p14:creationId xmlns:p14="http://schemas.microsoft.com/office/powerpoint/2010/main" val="3505820384"/>
+      </p:ext>
+    </p:extLst>
   </p:cSld>
   <p:clrMapOvr>
     <a:masterClrMapping/>
   </p:clrMapOvr>
+  <p:transition spd="med"/>
 </p:sld>
 </file>
 
 <file path=ppt/slides/slide5.xml><?xml version="1.0" encoding="utf-8"?>
-<p:sld xmlns:a="http://schemas.openxmlformats.org/drawingml/2006/main" xmlns:p="http://schemas.openxmlformats.org/presentationml/2006/main" xmlns:r="http://schemas.openxmlformats.org/officeDocument/2006/relationships">
+<p:sld xmlns:a="http://schemas.openxmlformats.org/drawingml/2006/main" xmlns:r="http://schemas.openxmlformats.org/officeDocument/2006/relationships" xmlns:p="http://schemas.openxmlformats.org/presentationml/2006/main">
   <p:cSld>
     <p:spTree>
       <p:nvGrpSpPr>
@@ -6305,6 +6092,14 @@
         <p:cNvGrpSpPr/>
         <p:nvPr/>
       </p:nvGrpSpPr>
+      <p:grpSpPr>
+        <a:xfrm>
+          <a:off x="0" y="0"/>
+          <a:ext cx="0" cy="0"/>
+          <a:chOff x="0" y="0"/>
+          <a:chExt cx="0" cy="0"/>
+        </a:xfrm>
+      </p:grpSpPr>
       <p:sp>
         <p:nvSpPr>
           <p:cNvPr id="149" name="Заголовок 1"/>
@@ -6337,16 +6132,14 @@
             </a:lvl1pPr>
           </a:lstStyle>
           <a:p>
-            <a:pPr>
-              <a:lnSpc>
-                <a:spcPct val="100000"/>
-              </a:lnSpc>
-            </a:pPr>
-            <a:r>
-              <a:rPr sz="2000" b="1"/>
+            <a:r>
+              <a:rPr sz="2000" b="1">
+                <a:solidFill>
+                  <a:srgbClr val="1A1A1A"/>
+                </a:solidFill>
+              </a:rPr>
               <a:t>ПОЗИЦИЯ СУДОВ ПО ВОПРОСУ ответственности работодателя за гибель до начала смены</a:t>
             </a:r>
-            <a:endParaRPr sz="1800" dirty="0"/>
           </a:p>
         </p:txBody>
       </p:sp>
@@ -6379,9 +6172,9 @@
           <a:lstStyle/>
           <a:p>
             <a:fld id="{86CB4B4D-7CA3-9044-876B-883B54F8677D}" type="slidenum">
+              <a:rPr sz="1400"/>
               <a:t>5</a:t>
             </a:fld>
-            <a:endParaRPr dirty="0"/>
           </a:p>
         </p:txBody>
       </p:sp>
@@ -6431,19 +6224,14 @@
           </a:bodyPr>
           <a:lstStyle/>
           <a:p>
-            <a:pPr hangingPunct="0"/>
             <a:r>
               <a:rPr sz="1300" b="0">
-                <a:latin typeface="Montserrat Bold"/>
+                <a:solidFill>
+                  <a:srgbClr val="1A1A1A"/>
+                </a:solidFill>
               </a:rPr>
               <a:t>СУТЬ ДЕЛА: Работник АО «Металлургический завод Балаково» получил доступ к опасному участку до начала рабочего времени и погиб. Мать требовала компенсацию морального вреда</a:t>
             </a:r>
-            <a:endParaRPr lang="ru-RU" sz="1600" dirty="0">
-              <a:solidFill>
-                <a:srgbClr val="000000"/>
-              </a:solidFill>
-              <a:sym typeface="Montserrat Regular"/>
-            </a:endParaRPr>
           </a:p>
         </p:txBody>
       </p:sp>
@@ -6499,31 +6287,14 @@
                     <a:bodyPr/>
                     <a:lstStyle/>
                     <a:p>
-                      <a:pPr algn="ctr">
-                        <a:lnSpc>
-                          <a:spcPct val="107000"/>
-                        </a:lnSpc>
-                        <a:spcAft>
-                          <a:spcPts val="800"/>
-                        </a:spcAft>
-                      </a:pPr>
                       <a:r>
-                        <a:rPr b="1" sz="1200">
+                        <a:rPr sz="1200" b="1">
                           <a:solidFill>
                             <a:srgbClr val="1A1A1A"/>
                           </a:solidFill>
                         </a:rPr>
                         <a:t>Позиция семьи погибшего</a:t>
                       </a:r>
-                      <a:endParaRPr lang="ru-RU" sz="1600" kern="100" dirty="0">
-                        <a:solidFill>
-                          <a:schemeClr val="bg1"/>
-                        </a:solidFill>
-                        <a:effectLst/>
-                        <a:latin typeface="Montserrat Bold" panose="00000800000000000000" pitchFamily="2" charset="-52"/>
-                        <a:ea typeface="Aptos" panose="020B0004020202020204" pitchFamily="34" charset="0"/>
-                        <a:cs typeface="Times New Roman" panose="02020603050405020304" pitchFamily="18" charset="0"/>
-                      </a:endParaRPr>
                     </a:p>
                   </a:txBody>
                   <a:tcPr marL="0" marR="76200" marT="47625" marB="47625" anchor="ctr">
@@ -6539,31 +6310,14 @@
                     <a:bodyPr/>
                     <a:lstStyle/>
                     <a:p>
-                      <a:pPr algn="ctr">
-                        <a:lnSpc>
-                          <a:spcPct val="107000"/>
-                        </a:lnSpc>
-                        <a:spcAft>
-                          <a:spcPts val="800"/>
-                        </a:spcAft>
-                      </a:pPr>
                       <a:r>
-                        <a:rPr b="1" sz="1200">
+                        <a:rPr sz="1200" b="1">
                           <a:solidFill>
                             <a:srgbClr val="1A1A1A"/>
                           </a:solidFill>
                         </a:rPr>
                         <a:t>Позиция работодателя</a:t>
                       </a:r>
-                      <a:endParaRPr lang="ru-RU" sz="1600" kern="100" dirty="0">
-                        <a:solidFill>
-                          <a:schemeClr val="bg1"/>
-                        </a:solidFill>
-                        <a:effectLst/>
-                        <a:latin typeface="Montserrat Bold" panose="00000800000000000000" pitchFamily="2" charset="-52"/>
-                        <a:ea typeface="Aptos" panose="020B0004020202020204" pitchFamily="34" charset="0"/>
-                        <a:cs typeface="Times New Roman" panose="02020603050405020304" pitchFamily="18" charset="0"/>
-                      </a:endParaRPr>
                     </a:p>
                   </a:txBody>
                   <a:tcPr marL="76200" marR="76200" marT="47625" marB="47625" anchor="ctr">
@@ -6586,24 +6340,8 @@
                     <a:bodyPr/>
                     <a:lstStyle/>
                     <a:p>
-                      <a:pPr marL="0" marR="0" indent="0" algn="l" defTabSz="1828800" rtl="0" latinLnBrk="0">
-                        <a:lnSpc>
-                          <a:spcPct val="107000"/>
-                        </a:lnSpc>
-                        <a:spcBef>
-                          <a:spcPts val="0"/>
-                        </a:spcBef>
-                        <a:spcAft>
-                          <a:spcPts val="800"/>
-                        </a:spcAft>
-                        <a:buClrTx/>
-                        <a:buSzTx/>
-                        <a:buFontTx/>
-                        <a:buNone/>
-                        <a:tabLst/>
-                      </a:pPr>
                       <a:r>
-                        <a:rPr b="0" sz="1100">
+                        <a:rPr sz="1100" b="0">
                           <a:solidFill>
                             <a:srgbClr val="1A1A1A"/>
                           </a:solidFill>
@@ -6619,24 +6357,8 @@
                     <a:bodyPr/>
                     <a:lstStyle/>
                     <a:p>
-                      <a:pPr marL="0" marR="0" indent="0" algn="l" defTabSz="1828800" rtl="0" latinLnBrk="0">
-                        <a:lnSpc>
-                          <a:spcPct val="107000"/>
-                        </a:lnSpc>
-                        <a:spcBef>
-                          <a:spcPts val="0"/>
-                        </a:spcBef>
-                        <a:spcAft>
-                          <a:spcPts val="800"/>
-                        </a:spcAft>
-                        <a:buClrTx/>
-                        <a:buSzTx/>
-                        <a:buFontTx/>
-                        <a:buNone/>
-                        <a:tabLst/>
-                      </a:pPr>
                       <a:r>
-                        <a:rPr b="0" sz="1100">
+                        <a:rPr sz="1100" b="0">
                           <a:solidFill>
                             <a:srgbClr val="1A1A1A"/>
                           </a:solidFill>
@@ -6703,10 +6425,11 @@
           </a:bodyPr>
           <a:lstStyle/>
           <a:p>
-            <a:pPr hangingPunct="0"/>
             <a:r>
               <a:rPr sz="1400" b="1">
-                <a:latin typeface="Montserrat Bold"/>
+                <a:solidFill>
+                  <a:srgbClr val="1A1A1A"/>
+                </a:solidFill>
               </a:rPr>
               <a:t>ВЫВОД СУДА:</a:t>
             </a:r>
@@ -6714,7 +6437,9 @@
           <a:p>
             <a:r>
               <a:rPr sz="1300" b="0">
-                <a:latin typeface="Montserrat Bold"/>
+                <a:solidFill>
+                  <a:srgbClr val="1A1A1A"/>
+                </a:solidFill>
               </a:rPr>
               <a:t>ВС оставил в силе решение о компенсации морального вреда. «Ещё не начал смену» не снимает обязанность работодателя закрыть доступ к опасным зонам и обеспечить контроль.</a:t>
             </a:r>
@@ -6767,15 +6492,22 @@
           </a:bodyPr>
           <a:lstStyle/>
           <a:p>
-            <a:pPr algn="r"/>
-            <a:r>
-              <a:rPr sz="1200" b="0"/>
+            <a:r>
+              <a:rPr sz="1200" b="0">
+                <a:solidFill>
+                  <a:srgbClr val="1A1A1A"/>
+                </a:solidFill>
+              </a:rPr>
               <a:t>Определение Верховного Суда РФ</a:t>
             </a:r>
           </a:p>
           <a:p>
             <a:r>
-              <a:rPr sz="1200" b="0"/>
+              <a:rPr sz="1200" b="0">
+                <a:solidFill>
+                  <a:srgbClr val="1A1A1A"/>
+                </a:solidFill>
+              </a:rPr>
               <a:t>от 2 июня 2025 г. № 32-КГ25-7-К1</a:t>
             </a:r>
           </a:p>
@@ -6787,36 +6519,6 @@
             <a:extLst>
               <a:ext uri="{FF2B5EF4-FFF2-40B4-BE49-F238E27FC236}">
                 <a16:creationId xmlns:a16="http://schemas.microsoft.com/office/drawing/2014/main" id="{45333F64-5F15-55F5-A25A-B38B3CDAB602}"/>
-              </a:ext>
-            </a:extLst>
-          </p:cNvPr>
-          <p:cNvPicPr>
-            <a:picLocks noChangeAspect="1"/>
-          </p:cNvPicPr>
-          <p:nvPr/>
-        </p:nvPicPr>
-        <p:blipFill>
-          <a:blip r:embed="rId2"/>
-          <a:stretch>
-            <a:fillRect/>
-          </a:stretch>
-        </p:blipFill>
-        <p:spPr>
-          <a:xfrm>
-            <a:off x="331744" y="1686216"/>
-            <a:ext cx="671406" cy="671406"/>
-          </a:xfrm>
-          <a:prstGeom prst="rect">
-            <a:avLst/>
-          </a:prstGeom>
-        </p:spPr>
-      </p:pic>
-      <p:pic>
-        <p:nvPicPr>
-          <p:cNvPr id="7" name="Рисунок 6">
-            <a:extLst>
-              <a:ext uri="{FF2B5EF4-FFF2-40B4-BE49-F238E27FC236}">
-                <a16:creationId xmlns:a16="http://schemas.microsoft.com/office/drawing/2014/main" id="{FC8254E8-FE29-BD45-40F0-A01355EE1EB8}"/>
               </a:ext>
             </a:extLst>
           </p:cNvPr>
@@ -6833,25 +6535,60 @@
         </p:blipFill>
         <p:spPr>
           <a:xfrm>
-            <a:off x="331744" y="4743278"/>
-            <a:ext cx="1048616" cy="1048616"/>
+            <a:off x="331744" y="1686216"/>
+            <a:ext cx="671406" cy="671406"/>
           </a:xfrm>
           <a:prstGeom prst="rect">
             <a:avLst/>
           </a:prstGeom>
         </p:spPr>
       </p:pic>
-      <p:grpSpPr/>
+      <p:pic>
+        <p:nvPicPr>
+          <p:cNvPr id="7" name="Рисунок 6">
+            <a:extLst>
+              <a:ext uri="{FF2B5EF4-FFF2-40B4-BE49-F238E27FC236}">
+                <a16:creationId xmlns:a16="http://schemas.microsoft.com/office/drawing/2014/main" id="{FC8254E8-FE29-BD45-40F0-A01355EE1EB8}"/>
+              </a:ext>
+            </a:extLst>
+          </p:cNvPr>
+          <p:cNvPicPr>
+            <a:picLocks noChangeAspect="1"/>
+          </p:cNvPicPr>
+          <p:nvPr/>
+        </p:nvPicPr>
+        <p:blipFill>
+          <a:blip r:embed="rId4"/>
+          <a:stretch>
+            <a:fillRect/>
+          </a:stretch>
+        </p:blipFill>
+        <p:spPr>
+          <a:xfrm>
+            <a:off x="331744" y="4743278"/>
+            <a:ext cx="1048616" cy="1048616"/>
+          </a:xfrm>
+          <a:prstGeom prst="rect">
+            <a:avLst/>
+          </a:prstGeom>
+        </p:spPr>
+      </p:pic>
     </p:spTree>
+    <p:extLst>
+      <p:ext uri="{BB962C8B-B14F-4D97-AF65-F5344CB8AC3E}">
+        <p14:creationId xmlns:p14="http://schemas.microsoft.com/office/powerpoint/2010/main" val="3505820384"/>
+      </p:ext>
+    </p:extLst>
   </p:cSld>
   <p:clrMapOvr>
     <a:masterClrMapping/>
   </p:clrMapOvr>
+  <p:transition spd="med"/>
 </p:sld>
 </file>
 
 <file path=ppt/slides/slide6.xml><?xml version="1.0" encoding="utf-8"?>
-<p:sld xmlns:a="http://schemas.openxmlformats.org/drawingml/2006/main" xmlns:p="http://schemas.openxmlformats.org/presentationml/2006/main" xmlns:r="http://schemas.openxmlformats.org/officeDocument/2006/relationships">
+<p:sld xmlns:a="http://schemas.openxmlformats.org/drawingml/2006/main" xmlns:r="http://schemas.openxmlformats.org/officeDocument/2006/relationships" xmlns:p="http://schemas.openxmlformats.org/presentationml/2006/main">
   <p:cSld>
     <p:spTree>
       <p:nvGrpSpPr>
@@ -6859,6 +6596,14 @@
         <p:cNvGrpSpPr/>
         <p:nvPr/>
       </p:nvGrpSpPr>
+      <p:grpSpPr>
+        <a:xfrm>
+          <a:off x="0" y="0"/>
+          <a:ext cx="0" cy="0"/>
+          <a:chOff x="0" y="0"/>
+          <a:chExt cx="0" cy="0"/>
+        </a:xfrm>
+      </p:grpSpPr>
       <p:sp>
         <p:nvSpPr>
           <p:cNvPr id="149" name="Заголовок 1"/>
@@ -6891,16 +6636,14 @@
             </a:lvl1pPr>
           </a:lstStyle>
           <a:p>
-            <a:pPr>
-              <a:lnSpc>
-                <a:spcPct val="100000"/>
-              </a:lnSpc>
-            </a:pPr>
-            <a:r>
-              <a:rPr sz="2200" b="1"/>
+            <a:r>
+              <a:rPr sz="2200" b="1">
+                <a:solidFill>
+                  <a:srgbClr val="1A1A1A"/>
+                </a:solidFill>
+              </a:rPr>
               <a:t>ПОЗИЦИЯ СУДОВ ПО ВОПРОСУ взыскания штрафов ГИТ с аутсорсера по охране труда</a:t>
             </a:r>
-            <a:endParaRPr sz="1800" dirty="0"/>
           </a:p>
         </p:txBody>
       </p:sp>
@@ -6933,9 +6676,9 @@
           <a:lstStyle/>
           <a:p>
             <a:fld id="{86CB4B4D-7CA3-9044-876B-883B54F8677D}" type="slidenum">
+              <a:rPr sz="1400"/>
               <a:t>6</a:t>
             </a:fld>
-            <a:endParaRPr dirty="0"/>
           </a:p>
         </p:txBody>
       </p:sp>
@@ -6985,19 +6728,14 @@
           </a:bodyPr>
           <a:lstStyle/>
           <a:p>
-            <a:pPr hangingPunct="0"/>
             <a:r>
               <a:rPr sz="1300" b="0">
-                <a:latin typeface="Montserrat Bold"/>
+                <a:solidFill>
+                  <a:srgbClr val="1A1A1A"/>
+                </a:solidFill>
               </a:rPr>
               <a:t>СУТЬ ДЕЛА: ЖКХ оштрафовали за допуск работников без медосмотров и невыдачу СИЗ мастеру. Организация потребовала возместить суммы штрафов у фирмы, оказывавшей услуги по охране труда</a:t>
             </a:r>
-            <a:endParaRPr lang="ru-RU" sz="1600" dirty="0">
-              <a:solidFill>
-                <a:srgbClr val="000000"/>
-              </a:solidFill>
-              <a:sym typeface="Montserrat Regular"/>
-            </a:endParaRPr>
           </a:p>
         </p:txBody>
       </p:sp>
@@ -7053,31 +6791,14 @@
                     <a:bodyPr/>
                     <a:lstStyle/>
                     <a:p>
-                      <a:pPr algn="ctr">
-                        <a:lnSpc>
-                          <a:spcPct val="107000"/>
-                        </a:lnSpc>
-                        <a:spcAft>
-                          <a:spcPts val="800"/>
-                        </a:spcAft>
-                      </a:pPr>
                       <a:r>
-                        <a:rPr b="1" sz="1200">
+                        <a:rPr sz="1200" b="1">
                           <a:solidFill>
                             <a:srgbClr val="1A1A1A"/>
                           </a:solidFill>
                         </a:rPr>
                         <a:t>Позиция заказчика (ЖКХ)</a:t>
                       </a:r>
-                      <a:endParaRPr lang="ru-RU" sz="1600" kern="100" dirty="0">
-                        <a:solidFill>
-                          <a:schemeClr val="bg1"/>
-                        </a:solidFill>
-                        <a:effectLst/>
-                        <a:latin typeface="Montserrat Bold" panose="00000800000000000000" pitchFamily="2" charset="-52"/>
-                        <a:ea typeface="Aptos" panose="020B0004020202020204" pitchFamily="34" charset="0"/>
-                        <a:cs typeface="Times New Roman" panose="02020603050405020304" pitchFamily="18" charset="0"/>
-                      </a:endParaRPr>
                     </a:p>
                   </a:txBody>
                   <a:tcPr marL="0" marR="76200" marT="47625" marB="47625" anchor="ctr">
@@ -7093,31 +6814,14 @@
                     <a:bodyPr/>
                     <a:lstStyle/>
                     <a:p>
-                      <a:pPr algn="ctr">
-                        <a:lnSpc>
-                          <a:spcPct val="107000"/>
-                        </a:lnSpc>
-                        <a:spcAft>
-                          <a:spcPts val="800"/>
-                        </a:spcAft>
-                      </a:pPr>
                       <a:r>
-                        <a:rPr b="1" sz="1200">
+                        <a:rPr sz="1200" b="1">
                           <a:solidFill>
                             <a:srgbClr val="1A1A1A"/>
                           </a:solidFill>
                         </a:rPr>
                         <a:t>Позиция аутсорсера ОТ</a:t>
                       </a:r>
-                      <a:endParaRPr lang="ru-RU" sz="1600" kern="100" dirty="0">
-                        <a:solidFill>
-                          <a:schemeClr val="bg1"/>
-                        </a:solidFill>
-                        <a:effectLst/>
-                        <a:latin typeface="Montserrat Bold" panose="00000800000000000000" pitchFamily="2" charset="-52"/>
-                        <a:ea typeface="Aptos" panose="020B0004020202020204" pitchFamily="34" charset="0"/>
-                        <a:cs typeface="Times New Roman" panose="02020603050405020304" pitchFamily="18" charset="0"/>
-                      </a:endParaRPr>
                     </a:p>
                   </a:txBody>
                   <a:tcPr marL="76200" marR="76200" marT="47625" marB="47625" anchor="ctr">
@@ -7140,24 +6844,8 @@
                     <a:bodyPr/>
                     <a:lstStyle/>
                     <a:p>
-                      <a:pPr marL="0" marR="0" indent="0" algn="l" defTabSz="1828800" rtl="0" latinLnBrk="0">
-                        <a:lnSpc>
-                          <a:spcPct val="107000"/>
-                        </a:lnSpc>
-                        <a:spcBef>
-                          <a:spcPts val="0"/>
-                        </a:spcBef>
-                        <a:spcAft>
-                          <a:spcPts val="800"/>
-                        </a:spcAft>
-                        <a:buClrTx/>
-                        <a:buSzTx/>
-                        <a:buFontTx/>
-                        <a:buNone/>
-                        <a:tabLst/>
-                      </a:pPr>
                       <a:r>
-                        <a:rPr b="0" sz="1100">
+                        <a:rPr sz="1100" b="0">
                           <a:solidFill>
                             <a:srgbClr val="1A1A1A"/>
                           </a:solidFill>
@@ -7173,24 +6861,8 @@
                     <a:bodyPr/>
                     <a:lstStyle/>
                     <a:p>
-                      <a:pPr marL="0" marR="0" indent="0" algn="l" defTabSz="1828800" rtl="0" latinLnBrk="0">
-                        <a:lnSpc>
-                          <a:spcPct val="107000"/>
-                        </a:lnSpc>
-                        <a:spcBef>
-                          <a:spcPts val="0"/>
-                        </a:spcBef>
-                        <a:spcAft>
-                          <a:spcPts val="800"/>
-                        </a:spcAft>
-                        <a:buClrTx/>
-                        <a:buSzTx/>
-                        <a:buFontTx/>
-                        <a:buNone/>
-                        <a:tabLst/>
-                      </a:pPr>
                       <a:r>
-                        <a:rPr b="0" sz="1100">
+                        <a:rPr sz="1100" b="0">
                           <a:solidFill>
                             <a:srgbClr val="1A1A1A"/>
                           </a:solidFill>
@@ -7257,10 +6929,11 @@
           </a:bodyPr>
           <a:lstStyle/>
           <a:p>
-            <a:pPr hangingPunct="0"/>
             <a:r>
               <a:rPr sz="1400" b="1">
-                <a:latin typeface="Montserrat Bold"/>
+                <a:solidFill>
+                  <a:srgbClr val="1A1A1A"/>
+                </a:solidFill>
               </a:rPr>
               <a:t>ВЫВОД СУДА:</a:t>
             </a:r>
@@ -7268,7 +6941,9 @@
           <a:p>
             <a:r>
               <a:rPr sz="1300" b="0">
-                <a:latin typeface="Montserrat Bold"/>
+                <a:solidFill>
+                  <a:srgbClr val="1A1A1A"/>
+                </a:solidFill>
               </a:rPr>
               <a:t>По медосмотрам — отказ: вина самого работодателя. По СИЗ — штраф взыскан с аутсорсера: не включил профессию «мастер» в нормы выдачи. Аутсорсинг ОТ не снимает всю ответственность.</a:t>
             </a:r>
@@ -7321,15 +6996,22 @@
           </a:bodyPr>
           <a:lstStyle/>
           <a:p>
-            <a:pPr algn="r"/>
-            <a:r>
-              <a:rPr sz="1200" b="0"/>
+            <a:r>
+              <a:rPr sz="1200" b="0">
+                <a:solidFill>
+                  <a:srgbClr val="1A1A1A"/>
+                </a:solidFill>
+              </a:rPr>
               <a:t>Постановление Арбитражного суда Уральского округа</a:t>
             </a:r>
           </a:p>
           <a:p>
             <a:r>
-              <a:rPr sz="1200" b="0"/>
+              <a:rPr sz="1200" b="0">
+                <a:solidFill>
+                  <a:srgbClr val="1A1A1A"/>
+                </a:solidFill>
+              </a:rPr>
               <a:t>от 9 августа 2022 г. № Ф09-5362/22 по делу № А34-15160/2020</a:t>
             </a:r>
           </a:p>
@@ -7341,36 +7023,6 @@
             <a:extLst>
               <a:ext uri="{FF2B5EF4-FFF2-40B4-BE49-F238E27FC236}">
                 <a16:creationId xmlns:a16="http://schemas.microsoft.com/office/drawing/2014/main" id="{45333F64-5F15-55F5-A25A-B38B3CDAB602}"/>
-              </a:ext>
-            </a:extLst>
-          </p:cNvPr>
-          <p:cNvPicPr>
-            <a:picLocks noChangeAspect="1"/>
-          </p:cNvPicPr>
-          <p:nvPr/>
-        </p:nvPicPr>
-        <p:blipFill>
-          <a:blip r:embed="rId2"/>
-          <a:stretch>
-            <a:fillRect/>
-          </a:stretch>
-        </p:blipFill>
-        <p:spPr>
-          <a:xfrm>
-            <a:off x="331744" y="1686216"/>
-            <a:ext cx="671406" cy="671406"/>
-          </a:xfrm>
-          <a:prstGeom prst="rect">
-            <a:avLst/>
-          </a:prstGeom>
-        </p:spPr>
-      </p:pic>
-      <p:pic>
-        <p:nvPicPr>
-          <p:cNvPr id="7" name="Рисунок 6">
-            <a:extLst>
-              <a:ext uri="{FF2B5EF4-FFF2-40B4-BE49-F238E27FC236}">
-                <a16:creationId xmlns:a16="http://schemas.microsoft.com/office/drawing/2014/main" id="{FC8254E8-FE29-BD45-40F0-A01355EE1EB8}"/>
               </a:ext>
             </a:extLst>
           </p:cNvPr>
@@ -7387,25 +7039,60 @@
         </p:blipFill>
         <p:spPr>
           <a:xfrm>
-            <a:off x="331744" y="4743278"/>
-            <a:ext cx="1048616" cy="1048616"/>
+            <a:off x="331744" y="1686216"/>
+            <a:ext cx="671406" cy="671406"/>
           </a:xfrm>
           <a:prstGeom prst="rect">
             <a:avLst/>
           </a:prstGeom>
         </p:spPr>
       </p:pic>
-      <p:grpSpPr/>
+      <p:pic>
+        <p:nvPicPr>
+          <p:cNvPr id="7" name="Рисунок 6">
+            <a:extLst>
+              <a:ext uri="{FF2B5EF4-FFF2-40B4-BE49-F238E27FC236}">
+                <a16:creationId xmlns:a16="http://schemas.microsoft.com/office/drawing/2014/main" id="{FC8254E8-FE29-BD45-40F0-A01355EE1EB8}"/>
+              </a:ext>
+            </a:extLst>
+          </p:cNvPr>
+          <p:cNvPicPr>
+            <a:picLocks noChangeAspect="1"/>
+          </p:cNvPicPr>
+          <p:nvPr/>
+        </p:nvPicPr>
+        <p:blipFill>
+          <a:blip r:embed="rId4"/>
+          <a:stretch>
+            <a:fillRect/>
+          </a:stretch>
+        </p:blipFill>
+        <p:spPr>
+          <a:xfrm>
+            <a:off x="331744" y="4743278"/>
+            <a:ext cx="1048616" cy="1048616"/>
+          </a:xfrm>
+          <a:prstGeom prst="rect">
+            <a:avLst/>
+          </a:prstGeom>
+        </p:spPr>
+      </p:pic>
     </p:spTree>
+    <p:extLst>
+      <p:ext uri="{BB962C8B-B14F-4D97-AF65-F5344CB8AC3E}">
+        <p14:creationId xmlns:p14="http://schemas.microsoft.com/office/powerpoint/2010/main" val="3505820384"/>
+      </p:ext>
+    </p:extLst>
   </p:cSld>
   <p:clrMapOvr>
     <a:masterClrMapping/>
   </p:clrMapOvr>
+  <p:transition spd="med"/>
 </p:sld>
 </file>
 
 <file path=ppt/slides/slide7.xml><?xml version="1.0" encoding="utf-8"?>
-<p:sld xmlns:a="http://schemas.openxmlformats.org/drawingml/2006/main" xmlns:p="http://schemas.openxmlformats.org/presentationml/2006/main" xmlns:r="http://schemas.openxmlformats.org/officeDocument/2006/relationships">
+<p:sld xmlns:a="http://schemas.openxmlformats.org/drawingml/2006/main" xmlns:r="http://schemas.openxmlformats.org/officeDocument/2006/relationships" xmlns:p="http://schemas.openxmlformats.org/presentationml/2006/main">
   <p:cSld>
     <p:spTree>
       <p:nvGrpSpPr>
@@ -7413,6 +7100,14 @@
         <p:cNvGrpSpPr/>
         <p:nvPr/>
       </p:nvGrpSpPr>
+      <p:grpSpPr>
+        <a:xfrm>
+          <a:off x="0" y="0"/>
+          <a:ext cx="0" cy="0"/>
+          <a:chOff x="0" y="0"/>
+          <a:chExt cx="0" cy="0"/>
+        </a:xfrm>
+      </p:grpSpPr>
       <p:sp>
         <p:nvSpPr>
           <p:cNvPr id="149" name="Заголовок 1"/>
@@ -7445,16 +7140,14 @@
             </a:lvl1pPr>
           </a:lstStyle>
           <a:p>
-            <a:pPr>
-              <a:lnSpc>
-                <a:spcPct val="100000"/>
-              </a:lnSpc>
-            </a:pPr>
-            <a:r>
-              <a:rPr sz="2000" b="1"/>
+            <a:r>
+              <a:rPr sz="2000" b="1">
+                <a:solidFill>
+                  <a:srgbClr val="1A1A1A"/>
+                </a:solidFill>
+              </a:rPr>
               <a:t>ПОЗИЦИЯ СУДОВ ПО ВОПРОСУ ответственности руководителя за НС после запирания в цеху</a:t>
             </a:r>
-            <a:endParaRPr sz="1800" dirty="0"/>
           </a:p>
         </p:txBody>
       </p:sp>
@@ -7487,9 +7180,9 @@
           <a:lstStyle/>
           <a:p>
             <a:fld id="{86CB4B4D-7CA3-9044-876B-883B54F8677D}" type="slidenum">
+              <a:rPr sz="1400"/>
               <a:t>7</a:t>
             </a:fld>
-            <a:endParaRPr dirty="0"/>
           </a:p>
         </p:txBody>
       </p:sp>
@@ -7539,19 +7232,14 @@
           </a:bodyPr>
           <a:lstStyle/>
           <a:p>
-            <a:pPr hangingPunct="0"/>
             <a:r>
               <a:rPr sz="1300" b="0">
-                <a:latin typeface="Montserrat Bold"/>
+                <a:solidFill>
+                  <a:srgbClr val="1A1A1A"/>
+                </a:solidFill>
               </a:rPr>
               <a:t>СУТЬ ДЕЛА: После смены работница оказалась заперта на 2-м производственном этаже цеха; обнаружена под окном женского туалета с тяжёлым вредом здоровью. В акте НС указан начальник цеха</a:t>
             </a:r>
-            <a:endParaRPr lang="ru-RU" sz="1600" dirty="0">
-              <a:solidFill>
-                <a:srgbClr val="000000"/>
-              </a:solidFill>
-              <a:sym typeface="Montserrat Regular"/>
-            </a:endParaRPr>
           </a:p>
         </p:txBody>
       </p:sp>
@@ -7607,31 +7295,14 @@
                     <a:bodyPr/>
                     <a:lstStyle/>
                     <a:p>
-                      <a:pPr algn="ctr">
-                        <a:lnSpc>
-                          <a:spcPct val="107000"/>
-                        </a:lnSpc>
-                        <a:spcAft>
-                          <a:spcPts val="800"/>
-                        </a:spcAft>
-                      </a:pPr>
                       <a:r>
-                        <a:rPr b="1" sz="1200">
+                        <a:rPr sz="1200" b="1">
                           <a:solidFill>
                             <a:srgbClr val="1A1A1A"/>
                           </a:solidFill>
                         </a:rPr>
                         <a:t>Позиция комиссии / акта НС</a:t>
                       </a:r>
-                      <a:endParaRPr lang="ru-RU" sz="1600" kern="100" dirty="0">
-                        <a:solidFill>
-                          <a:schemeClr val="bg1"/>
-                        </a:solidFill>
-                        <a:effectLst/>
-                        <a:latin typeface="Montserrat Bold" panose="00000800000000000000" pitchFamily="2" charset="-52"/>
-                        <a:ea typeface="Aptos" panose="020B0004020202020204" pitchFamily="34" charset="0"/>
-                        <a:cs typeface="Times New Roman" panose="02020603050405020304" pitchFamily="18" charset="0"/>
-                      </a:endParaRPr>
                     </a:p>
                   </a:txBody>
                   <a:tcPr marL="0" marR="76200" marT="47625" marB="47625" anchor="ctr">
@@ -7647,31 +7318,14 @@
                     <a:bodyPr/>
                     <a:lstStyle/>
                     <a:p>
-                      <a:pPr algn="ctr">
-                        <a:lnSpc>
-                          <a:spcPct val="107000"/>
-                        </a:lnSpc>
-                        <a:spcAft>
-                          <a:spcPts val="800"/>
-                        </a:spcAft>
-                      </a:pPr>
                       <a:r>
-                        <a:rPr b="1" sz="1200">
+                        <a:rPr sz="1200" b="1">
                           <a:solidFill>
                             <a:srgbClr val="1A1A1A"/>
                           </a:solidFill>
                         </a:rPr>
                         <a:t>Позиция начальника цеха</a:t>
                       </a:r>
-                      <a:endParaRPr lang="ru-RU" sz="1600" kern="100" dirty="0">
-                        <a:solidFill>
-                          <a:schemeClr val="bg1"/>
-                        </a:solidFill>
-                        <a:effectLst/>
-                        <a:latin typeface="Montserrat Bold" panose="00000800000000000000" pitchFamily="2" charset="-52"/>
-                        <a:ea typeface="Aptos" panose="020B0004020202020204" pitchFamily="34" charset="0"/>
-                        <a:cs typeface="Times New Roman" panose="02020603050405020304" pitchFamily="18" charset="0"/>
-                      </a:endParaRPr>
                     </a:p>
                   </a:txBody>
                   <a:tcPr marL="76200" marR="76200" marT="47625" marB="47625" anchor="ctr">
@@ -7694,24 +7348,8 @@
                     <a:bodyPr/>
                     <a:lstStyle/>
                     <a:p>
-                      <a:pPr marL="0" marR="0" indent="0" algn="l" defTabSz="1828800" rtl="0" latinLnBrk="0">
-                        <a:lnSpc>
-                          <a:spcPct val="107000"/>
-                        </a:lnSpc>
-                        <a:spcBef>
-                          <a:spcPts val="0"/>
-                        </a:spcBef>
-                        <a:spcAft>
-                          <a:spcPts val="800"/>
-                        </a:spcAft>
-                        <a:buClrTx/>
-                        <a:buSzTx/>
-                        <a:buFontTx/>
-                        <a:buNone/>
-                        <a:tabLst/>
-                      </a:pPr>
                       <a:r>
-                        <a:rPr b="0" sz="1100">
+                        <a:rPr sz="1100" b="0">
                           <a:solidFill>
                             <a:srgbClr val="1A1A1A"/>
                           </a:solidFill>
@@ -7727,24 +7365,8 @@
                     <a:bodyPr/>
                     <a:lstStyle/>
                     <a:p>
-                      <a:pPr marL="0" marR="0" indent="0" algn="l" defTabSz="1828800" rtl="0" latinLnBrk="0">
-                        <a:lnSpc>
-                          <a:spcPct val="107000"/>
-                        </a:lnSpc>
-                        <a:spcBef>
-                          <a:spcPts val="0"/>
-                        </a:spcBef>
-                        <a:spcAft>
-                          <a:spcPts val="800"/>
-                        </a:spcAft>
-                        <a:buClrTx/>
-                        <a:buSzTx/>
-                        <a:buFontTx/>
-                        <a:buNone/>
-                        <a:tabLst/>
-                      </a:pPr>
                       <a:r>
-                        <a:rPr b="0" sz="1100">
+                        <a:rPr sz="1100" b="0">
                           <a:solidFill>
                             <a:srgbClr val="1A1A1A"/>
                           </a:solidFill>
@@ -7811,10 +7433,11 @@
           </a:bodyPr>
           <a:lstStyle/>
           <a:p>
-            <a:pPr hangingPunct="0"/>
             <a:r>
               <a:rPr sz="1400" b="1">
-                <a:latin typeface="Montserrat Bold"/>
+                <a:solidFill>
+                  <a:srgbClr val="1A1A1A"/>
+                </a:solidFill>
               </a:rPr>
               <a:t>ВЫВОД СУДА:</a:t>
             </a:r>
@@ -7822,7 +7445,9 @@
           <a:p>
             <a:r>
               <a:rPr sz="1300" b="0">
-                <a:latin typeface="Montserrat Bold"/>
+                <a:solidFill>
+                  <a:srgbClr val="1A1A1A"/>
+                </a:solidFill>
               </a:rPr>
               <a:t>Иск начальника цеха отклонён. Контроль за соблюдением ПВТР не обеспечен; указание руководителя виновным лицом обоснованно. Даже «бытовой» сценарий (заперли / окно) не снимает ответственность за дисциплину и безопасность.</a:t>
             </a:r>
@@ -7875,15 +7500,22 @@
           </a:bodyPr>
           <a:lstStyle/>
           <a:p>
-            <a:pPr algn="r"/>
-            <a:r>
-              <a:rPr sz="1200" b="0"/>
+            <a:r>
+              <a:rPr sz="1200" b="0">
+                <a:solidFill>
+                  <a:srgbClr val="1A1A1A"/>
+                </a:solidFill>
+              </a:rPr>
               <a:t>Обзор судебной практики EcoStandard</a:t>
             </a:r>
           </a:p>
           <a:p>
             <a:r>
-              <a:rPr sz="1200" b="0"/>
+              <a:rPr sz="1200" b="0">
+                <a:solidFill>
+                  <a:srgbClr val="1A1A1A"/>
+                </a:solidFill>
+              </a:rPr>
               <a:t>(АО «НПЦАП»; номер дела в открытых источниках не опубликован)</a:t>
             </a:r>
           </a:p>
@@ -7895,36 +7527,6 @@
             <a:extLst>
               <a:ext uri="{FF2B5EF4-FFF2-40B4-BE49-F238E27FC236}">
                 <a16:creationId xmlns:a16="http://schemas.microsoft.com/office/drawing/2014/main" id="{45333F64-5F15-55F5-A25A-B38B3CDAB602}"/>
-              </a:ext>
-            </a:extLst>
-          </p:cNvPr>
-          <p:cNvPicPr>
-            <a:picLocks noChangeAspect="1"/>
-          </p:cNvPicPr>
-          <p:nvPr/>
-        </p:nvPicPr>
-        <p:blipFill>
-          <a:blip r:embed="rId2"/>
-          <a:stretch>
-            <a:fillRect/>
-          </a:stretch>
-        </p:blipFill>
-        <p:spPr>
-          <a:xfrm>
-            <a:off x="331744" y="1686216"/>
-            <a:ext cx="671406" cy="671406"/>
-          </a:xfrm>
-          <a:prstGeom prst="rect">
-            <a:avLst/>
-          </a:prstGeom>
-        </p:spPr>
-      </p:pic>
-      <p:pic>
-        <p:nvPicPr>
-          <p:cNvPr id="7" name="Рисунок 6">
-            <a:extLst>
-              <a:ext uri="{FF2B5EF4-FFF2-40B4-BE49-F238E27FC236}">
-                <a16:creationId xmlns:a16="http://schemas.microsoft.com/office/drawing/2014/main" id="{FC8254E8-FE29-BD45-40F0-A01355EE1EB8}"/>
               </a:ext>
             </a:extLst>
           </p:cNvPr>
@@ -7941,25 +7543,60 @@
         </p:blipFill>
         <p:spPr>
           <a:xfrm>
-            <a:off x="331744" y="4743278"/>
-            <a:ext cx="1048616" cy="1048616"/>
+            <a:off x="331744" y="1686216"/>
+            <a:ext cx="671406" cy="671406"/>
           </a:xfrm>
           <a:prstGeom prst="rect">
             <a:avLst/>
           </a:prstGeom>
         </p:spPr>
       </p:pic>
-      <p:grpSpPr/>
+      <p:pic>
+        <p:nvPicPr>
+          <p:cNvPr id="7" name="Рисунок 6">
+            <a:extLst>
+              <a:ext uri="{FF2B5EF4-FFF2-40B4-BE49-F238E27FC236}">
+                <a16:creationId xmlns:a16="http://schemas.microsoft.com/office/drawing/2014/main" id="{FC8254E8-FE29-BD45-40F0-A01355EE1EB8}"/>
+              </a:ext>
+            </a:extLst>
+          </p:cNvPr>
+          <p:cNvPicPr>
+            <a:picLocks noChangeAspect="1"/>
+          </p:cNvPicPr>
+          <p:nvPr/>
+        </p:nvPicPr>
+        <p:blipFill>
+          <a:blip r:embed="rId4"/>
+          <a:stretch>
+            <a:fillRect/>
+          </a:stretch>
+        </p:blipFill>
+        <p:spPr>
+          <a:xfrm>
+            <a:off x="331744" y="4743278"/>
+            <a:ext cx="1048616" cy="1048616"/>
+          </a:xfrm>
+          <a:prstGeom prst="rect">
+            <a:avLst/>
+          </a:prstGeom>
+        </p:spPr>
+      </p:pic>
     </p:spTree>
+    <p:extLst>
+      <p:ext uri="{BB962C8B-B14F-4D97-AF65-F5344CB8AC3E}">
+        <p14:creationId xmlns:p14="http://schemas.microsoft.com/office/powerpoint/2010/main" val="3505820384"/>
+      </p:ext>
+    </p:extLst>
   </p:cSld>
   <p:clrMapOvr>
     <a:masterClrMapping/>
   </p:clrMapOvr>
+  <p:transition spd="med"/>
 </p:sld>
 </file>
 
 <file path=ppt/slides/slide8.xml><?xml version="1.0" encoding="utf-8"?>
-<p:sld xmlns:a="http://schemas.openxmlformats.org/drawingml/2006/main" xmlns:p="http://schemas.openxmlformats.org/presentationml/2006/main" xmlns:r="http://schemas.openxmlformats.org/officeDocument/2006/relationships">
+<p:sld xmlns:a="http://schemas.openxmlformats.org/drawingml/2006/main" xmlns:r="http://schemas.openxmlformats.org/officeDocument/2006/relationships" xmlns:p="http://schemas.openxmlformats.org/presentationml/2006/main">
   <p:cSld>
     <p:spTree>
       <p:nvGrpSpPr>
@@ -7967,6 +7604,14 @@
         <p:cNvGrpSpPr/>
         <p:nvPr/>
       </p:nvGrpSpPr>
+      <p:grpSpPr>
+        <a:xfrm>
+          <a:off x="0" y="0"/>
+          <a:ext cx="0" cy="0"/>
+          <a:chOff x="0" y="0"/>
+          <a:chExt cx="0" cy="0"/>
+        </a:xfrm>
+      </p:grpSpPr>
       <p:sp>
         <p:nvSpPr>
           <p:cNvPr id="149" name="Заголовок 1"/>
@@ -7999,16 +7644,14 @@
             </a:lvl1pPr>
           </a:lstStyle>
           <a:p>
-            <a:pPr>
-              <a:lnSpc>
-                <a:spcPct val="100000"/>
-              </a:lnSpc>
-            </a:pPr>
-            <a:r>
-              <a:rPr sz="2200" b="1"/>
+            <a:r>
+              <a:rPr sz="2200" b="1">
+                <a:solidFill>
+                  <a:srgbClr val="1A1A1A"/>
+                </a:solidFill>
+              </a:rPr>
               <a:t>ПОЗИЦИЯ СУДОВ ПО ВОПРОСУ квалификации смерти на физзачёте в выходной как НС</a:t>
             </a:r>
-            <a:endParaRPr sz="1800" dirty="0"/>
           </a:p>
         </p:txBody>
       </p:sp>
@@ -8041,9 +7684,9 @@
           <a:lstStyle/>
           <a:p>
             <a:fld id="{86CB4B4D-7CA3-9044-876B-883B54F8677D}" type="slidenum">
+              <a:rPr sz="1400"/>
               <a:t>8</a:t>
             </a:fld>
-            <a:endParaRPr dirty="0"/>
           </a:p>
         </p:txBody>
       </p:sp>
@@ -8093,19 +7736,14 @@
           </a:bodyPr>
           <a:lstStyle/>
           <a:p>
-            <a:pPr hangingPunct="0"/>
             <a:r>
               <a:rPr sz="1300" b="0">
-                <a:latin typeface="Montserrat Bold"/>
+                <a:solidFill>
+                  <a:srgbClr val="1A1A1A"/>
+                </a:solidFill>
               </a:rPr>
               <a:t>СУТЬ ДЕЛА: Стажёр-охранник в свой выходной приехал в спортзал на зачёт по физподготовке (спарринг), после чего впал в кому и умер. ГИТ квалифицировала случай как НС на производстве</a:t>
             </a:r>
-            <a:endParaRPr lang="ru-RU" sz="1600" dirty="0">
-              <a:solidFill>
-                <a:srgbClr val="000000"/>
-              </a:solidFill>
-              <a:sym typeface="Montserrat Regular"/>
-            </a:endParaRPr>
           </a:p>
         </p:txBody>
       </p:sp>
@@ -8161,31 +7799,14 @@
                     <a:bodyPr/>
                     <a:lstStyle/>
                     <a:p>
-                      <a:pPr algn="ctr">
-                        <a:lnSpc>
-                          <a:spcPct val="107000"/>
-                        </a:lnSpc>
-                        <a:spcAft>
-                          <a:spcPts val="800"/>
-                        </a:spcAft>
-                      </a:pPr>
                       <a:r>
-                        <a:rPr b="1" sz="1200">
+                        <a:rPr sz="1200" b="1">
                           <a:solidFill>
                             <a:srgbClr val="1A1A1A"/>
                           </a:solidFill>
                         </a:rPr>
                         <a:t>Позиция ГИТ</a:t>
                       </a:r>
-                      <a:endParaRPr lang="ru-RU" sz="1600" kern="100" dirty="0">
-                        <a:solidFill>
-                          <a:schemeClr val="bg1"/>
-                        </a:solidFill>
-                        <a:effectLst/>
-                        <a:latin typeface="Montserrat Bold" panose="00000800000000000000" pitchFamily="2" charset="-52"/>
-                        <a:ea typeface="Aptos" panose="020B0004020202020204" pitchFamily="34" charset="0"/>
-                        <a:cs typeface="Times New Roman" panose="02020603050405020304" pitchFamily="18" charset="0"/>
-                      </a:endParaRPr>
                     </a:p>
                   </a:txBody>
                   <a:tcPr marL="0" marR="76200" marT="47625" marB="47625" anchor="ctr">
@@ -8201,31 +7822,14 @@
                     <a:bodyPr/>
                     <a:lstStyle/>
                     <a:p>
-                      <a:pPr algn="ctr">
-                        <a:lnSpc>
-                          <a:spcPct val="107000"/>
-                        </a:lnSpc>
-                        <a:spcAft>
-                          <a:spcPts val="800"/>
-                        </a:spcAft>
-                      </a:pPr>
                       <a:r>
-                        <a:rPr b="1" sz="1200">
+                        <a:rPr sz="1200" b="1">
                           <a:solidFill>
                             <a:srgbClr val="1A1A1A"/>
                           </a:solidFill>
                         </a:rPr>
                         <a:t>Позиция работодателя</a:t>
                       </a:r>
-                      <a:endParaRPr lang="ru-RU" sz="1600" kern="100" dirty="0">
-                        <a:solidFill>
-                          <a:schemeClr val="bg1"/>
-                        </a:solidFill>
-                        <a:effectLst/>
-                        <a:latin typeface="Montserrat Bold" panose="00000800000000000000" pitchFamily="2" charset="-52"/>
-                        <a:ea typeface="Aptos" panose="020B0004020202020204" pitchFamily="34" charset="0"/>
-                        <a:cs typeface="Times New Roman" panose="02020603050405020304" pitchFamily="18" charset="0"/>
-                      </a:endParaRPr>
                     </a:p>
                   </a:txBody>
                   <a:tcPr marL="76200" marR="76200" marT="47625" marB="47625" anchor="ctr">
@@ -8248,24 +7852,8 @@
                     <a:bodyPr/>
                     <a:lstStyle/>
                     <a:p>
-                      <a:pPr marL="0" marR="0" indent="0" algn="l" defTabSz="1828800" rtl="0" latinLnBrk="0">
-                        <a:lnSpc>
-                          <a:spcPct val="107000"/>
-                        </a:lnSpc>
-                        <a:spcBef>
-                          <a:spcPts val="0"/>
-                        </a:spcBef>
-                        <a:spcAft>
-                          <a:spcPts val="800"/>
-                        </a:spcAft>
-                        <a:buClrTx/>
-                        <a:buSzTx/>
-                        <a:buFontTx/>
-                        <a:buNone/>
-                        <a:tabLst/>
-                      </a:pPr>
                       <a:r>
-                        <a:rPr b="0" sz="1100">
+                        <a:rPr sz="1100" b="0">
                           <a:solidFill>
                             <a:srgbClr val="1A1A1A"/>
                           </a:solidFill>
@@ -8281,24 +7869,8 @@
                     <a:bodyPr/>
                     <a:lstStyle/>
                     <a:p>
-                      <a:pPr marL="0" marR="0" indent="0" algn="l" defTabSz="1828800" rtl="0" latinLnBrk="0">
-                        <a:lnSpc>
-                          <a:spcPct val="107000"/>
-                        </a:lnSpc>
-                        <a:spcBef>
-                          <a:spcPts val="0"/>
-                        </a:spcBef>
-                        <a:spcAft>
-                          <a:spcPts val="800"/>
-                        </a:spcAft>
-                        <a:buClrTx/>
-                        <a:buSzTx/>
-                        <a:buFontTx/>
-                        <a:buNone/>
-                        <a:tabLst/>
-                      </a:pPr>
                       <a:r>
-                        <a:rPr b="0" sz="1100">
+                        <a:rPr sz="1100" b="0">
                           <a:solidFill>
                             <a:srgbClr val="1A1A1A"/>
                           </a:solidFill>
@@ -8365,10 +7937,11 @@
           </a:bodyPr>
           <a:lstStyle/>
           <a:p>
-            <a:pPr hangingPunct="0"/>
             <a:r>
               <a:rPr sz="1400" b="1">
-                <a:latin typeface="Montserrat Bold"/>
+                <a:solidFill>
+                  <a:srgbClr val="1A1A1A"/>
+                </a:solidFill>
               </a:rPr>
               <a:t>ВЫВОД СУДА:</a:t>
             </a:r>
@@ -8376,7 +7949,9 @@
           <a:p>
             <a:r>
               <a:rPr sz="1300" b="0">
-                <a:latin typeface="Montserrat Bold"/>
+                <a:solidFill>
+                  <a:srgbClr val="1A1A1A"/>
+                </a:solidFill>
               </a:rPr>
               <a:t>Выводы ГИТ верны. Выходной и «добровольность» не исключают производственный характер, если мероприятие назначено руководителем и связано с трудовой деятельностью.</a:t>
             </a:r>
@@ -8429,15 +8004,22 @@
           </a:bodyPr>
           <a:lstStyle/>
           <a:p>
-            <a:pPr algn="r"/>
-            <a:r>
-              <a:rPr sz="1200" b="0"/>
+            <a:r>
+              <a:rPr sz="1200" b="0">
+                <a:solidFill>
+                  <a:srgbClr val="1A1A1A"/>
+                </a:solidFill>
+              </a:rPr>
               <a:t>Обзор судебной практики EcoStandard</a:t>
             </a:r>
           </a:p>
           <a:p>
             <a:r>
-              <a:rPr sz="1200" b="0"/>
+              <a:rPr sz="1200" b="0">
+                <a:solidFill>
+                  <a:srgbClr val="1A1A1A"/>
+                </a:solidFill>
+              </a:rPr>
               <a:t>(ООО «ЧОП «Дельта»; номер дела в открытых источниках не опубликован)</a:t>
             </a:r>
           </a:p>
@@ -8449,36 +8031,6 @@
             <a:extLst>
               <a:ext uri="{FF2B5EF4-FFF2-40B4-BE49-F238E27FC236}">
                 <a16:creationId xmlns:a16="http://schemas.microsoft.com/office/drawing/2014/main" id="{45333F64-5F15-55F5-A25A-B38B3CDAB602}"/>
-              </a:ext>
-            </a:extLst>
-          </p:cNvPr>
-          <p:cNvPicPr>
-            <a:picLocks noChangeAspect="1"/>
-          </p:cNvPicPr>
-          <p:nvPr/>
-        </p:nvPicPr>
-        <p:blipFill>
-          <a:blip r:embed="rId2"/>
-          <a:stretch>
-            <a:fillRect/>
-          </a:stretch>
-        </p:blipFill>
-        <p:spPr>
-          <a:xfrm>
-            <a:off x="331744" y="1686216"/>
-            <a:ext cx="671406" cy="671406"/>
-          </a:xfrm>
-          <a:prstGeom prst="rect">
-            <a:avLst/>
-          </a:prstGeom>
-        </p:spPr>
-      </p:pic>
-      <p:pic>
-        <p:nvPicPr>
-          <p:cNvPr id="7" name="Рисунок 6">
-            <a:extLst>
-              <a:ext uri="{FF2B5EF4-FFF2-40B4-BE49-F238E27FC236}">
-                <a16:creationId xmlns:a16="http://schemas.microsoft.com/office/drawing/2014/main" id="{FC8254E8-FE29-BD45-40F0-A01355EE1EB8}"/>
               </a:ext>
             </a:extLst>
           </p:cNvPr>
@@ -8495,20 +8047,55 @@
         </p:blipFill>
         <p:spPr>
           <a:xfrm>
-            <a:off x="331744" y="4743278"/>
-            <a:ext cx="1048616" cy="1048616"/>
+            <a:off x="331744" y="1686216"/>
+            <a:ext cx="671406" cy="671406"/>
           </a:xfrm>
           <a:prstGeom prst="rect">
             <a:avLst/>
           </a:prstGeom>
         </p:spPr>
       </p:pic>
-      <p:grpSpPr/>
+      <p:pic>
+        <p:nvPicPr>
+          <p:cNvPr id="7" name="Рисунок 6">
+            <a:extLst>
+              <a:ext uri="{FF2B5EF4-FFF2-40B4-BE49-F238E27FC236}">
+                <a16:creationId xmlns:a16="http://schemas.microsoft.com/office/drawing/2014/main" id="{FC8254E8-FE29-BD45-40F0-A01355EE1EB8}"/>
+              </a:ext>
+            </a:extLst>
+          </p:cNvPr>
+          <p:cNvPicPr>
+            <a:picLocks noChangeAspect="1"/>
+          </p:cNvPicPr>
+          <p:nvPr/>
+        </p:nvPicPr>
+        <p:blipFill>
+          <a:blip r:embed="rId4"/>
+          <a:stretch>
+            <a:fillRect/>
+          </a:stretch>
+        </p:blipFill>
+        <p:spPr>
+          <a:xfrm>
+            <a:off x="331744" y="4743278"/>
+            <a:ext cx="1048616" cy="1048616"/>
+          </a:xfrm>
+          <a:prstGeom prst="rect">
+            <a:avLst/>
+          </a:prstGeom>
+        </p:spPr>
+      </p:pic>
     </p:spTree>
+    <p:extLst>
+      <p:ext uri="{BB962C8B-B14F-4D97-AF65-F5344CB8AC3E}">
+        <p14:creationId xmlns:p14="http://schemas.microsoft.com/office/powerpoint/2010/main" val="3505820384"/>
+      </p:ext>
+    </p:extLst>
   </p:cSld>
   <p:clrMapOvr>
     <a:masterClrMapping/>
   </p:clrMapOvr>
+  <p:transition spd="med"/>
 </p:sld>
 </file>
 
